--- a/スライド/ch14.pptx
+++ b/スライド/ch14.pptx
@@ -611,13 +611,13 @@
           <a:lstStyle/>
           <a:p>
             <a:r>
-              <a:t>③の説明が最も腑に落ちる。数式より先にこちらを話してもよい。</a:t>
+              <a:t>前の 1 枚に ② を足しただけ。薄い段はまだ出していない段。</a:t>
             </a:r>
           </a:p>
           <a:p/>
           <a:p>
             <a:r>
-              <a:t>_class: sections</a:t>
+              <a:t>_class: figure-full</a:t>
             </a:r>
           </a:p>
         </p:txBody>
@@ -687,13 +687,13 @@
           <a:lstStyle/>
           <a:p>
             <a:r>
-              <a:t>③の説明が最も腑に落ちる。数式より先にこちらを話してもよい。</a:t>
+              <a:t>前の 1 枚に ③ を足しただけ。薄い段はまだ出していない段。</a:t>
             </a:r>
           </a:p>
           <a:p/>
           <a:p>
             <a:r>
-              <a:t>_class: sections</a:t>
+              <a:t>_class: figure-full</a:t>
             </a:r>
           </a:p>
         </p:txBody>
@@ -1593,7 +1593,7 @@
           <a:p/>
           <a:p>
             <a:r>
-              <a:t>_class: sections</a:t>
+              <a:t>_class: figure-full</a:t>
             </a:r>
           </a:p>
         </p:txBody>
@@ -1663,13 +1663,13 @@
           <a:lstStyle/>
           <a:p>
             <a:r>
-              <a:t>②が直感の核心。「安い電気が届かないから高い電気を使う」という当たり前のことを価格が表している。</a:t>
+              <a:t>前の 1 枚に ② を足しただけ。薄い段はまだ出していない段。</a:t>
             </a:r>
           </a:p>
           <a:p/>
           <a:p>
             <a:r>
-              <a:t>_class: sections</a:t>
+              <a:t>_class: figure-full</a:t>
             </a:r>
           </a:p>
         </p:txBody>
@@ -1739,13 +1739,13 @@
           <a:lstStyle/>
           <a:p>
             <a:r>
-              <a:t>②が直感の核心。「安い電気が届かないから高い電気を使う」という当たり前のことを価格が表している。</a:t>
+              <a:t>前の 1 枚に ③ を足しただけ。薄い段はまだ出していない段。</a:t>
             </a:r>
           </a:p>
           <a:p/>
           <a:p>
             <a:r>
-              <a:t>_class: sections</a:t>
+              <a:t>_class: figure-full</a:t>
             </a:r>
           </a:p>
         </p:txBody>
@@ -2983,7 +2983,7 @@
           <a:p/>
           <a:p>
             <a:r>
-              <a:t>_class: sections</a:t>
+              <a:t>_class: figure-full</a:t>
             </a:r>
           </a:p>
         </p:txBody>
@@ -6902,59 +6902,14 @@
       <p:grpSpPr/>
       <p:sp>
         <p:nvSpPr>
-          <p:cNvPr id="2" name="TextBox 1"/>
+          <p:cNvPr id="2" name="edge:title"/>
           <p:cNvSpPr txBox="1"/>
           <p:nvPr/>
         </p:nvSpPr>
         <p:spPr>
           <a:xfrm>
-            <a:off x="566928" y="457200"/>
-            <a:ext cx="11057839" cy="658368"/>
-          </a:xfrm>
-          <a:prstGeom prst="rect">
-            <a:avLst/>
-          </a:prstGeom>
-          <a:noFill/>
-        </p:spPr>
-        <p:txBody>
-          <a:bodyPr wrap="square" lIns="0" rIns="0" tIns="0" bIns="0" anchor="ctr">
-            <a:noAutofit/>
-          </a:bodyPr>
-          <a:lstStyle/>
-          <a:p>
-            <a:pPr>
-              <a:lnSpc>
-                <a:spcPct val="106000"/>
-              </a:lnSpc>
-              <a:defRPr sz="3390" b="1">
-                <a:solidFill>
-                  <a:srgbClr val="7C332A"/>
-                </a:solidFill>
-                <a:latin typeface="Avenir Next"/>
-                <a:ea typeface="Hiragino Sans"/>
-                <a:cs typeface="Hiragino Sans"/>
-              </a:defRPr>
-            </a:pPr>
-            <a:r>
-              <a:rPr>
-                <a:ea typeface="Hiragino Sans"/>
-                <a:cs typeface="Hiragino Sans"/>
-              </a:rPr>
-              <a:t>導出 — 等 λ 法</a:t>
-            </a:r>
-          </a:p>
-        </p:txBody>
-      </p:sp>
-      <p:sp>
-        <p:nvSpPr>
-          <p:cNvPr id="3" name="TextBox 2"/>
-          <p:cNvSpPr txBox="1"/>
-          <p:nvPr/>
-        </p:nvSpPr>
-        <p:spPr>
-          <a:xfrm>
-            <a:off x="566928" y="2229993"/>
-            <a:ext cx="11057839" cy="254000"/>
+            <a:off x="566928" y="146304"/>
+            <a:ext cx="11057839" cy="457200"/>
           </a:xfrm>
           <a:prstGeom prst="rect">
             <a:avLst/>
@@ -6967,30 +6922,60 @@
           </a:bodyPr>
           <a:lstStyle/>
           <a:p>
-            <a:r>
-              <a:rPr sz="1600" b="1">
-                <a:solidFill>
-                  <a:srgbClr val="5C7268"/>
-                </a:solidFill>
-                <a:latin typeface="Avenir Next"/>
-                <a:ea typeface="Hiragino Sans"/>
-                <a:cs typeface="Hiragino Sans"/>
-              </a:rPr>
-              <a:t>① 問題を書く｜総費用を最小に、需給は一致</a:t>
-            </a:r>
-          </a:p>
-        </p:txBody>
-      </p:sp>
-      <p:sp>
-        <p:nvSpPr>
-          <p:cNvPr id="4" name="TextBox 3"/>
+            <a:pPr>
+              <a:defRPr sz="2400" b="1">
+                <a:solidFill>
+                  <a:srgbClr val="7C332A"/>
+                </a:solidFill>
+                <a:latin typeface="Avenir Next"/>
+                <a:ea typeface="Hiragino Sans"/>
+                <a:cs typeface="Hiragino Sans"/>
+              </a:defRPr>
+            </a:pPr>
+            <a:r>
+              <a:rPr>
+                <a:ea typeface="Hiragino Sans"/>
+                <a:cs typeface="Hiragino Sans"/>
+              </a:rPr>
+              <a:t>導出 — 等 λ 法</a:t>
+            </a:r>
+          </a:p>
+        </p:txBody>
+      </p:sp>
+      <p:pic>
+        <p:nvPicPr>
+          <p:cNvPr id="3" name="Picture 2" descr="ch14_deriv_lambda_2.png"/>
+          <p:cNvPicPr>
+            <a:picLocks noChangeAspect="1"/>
+          </p:cNvPicPr>
+          <p:nvPr/>
+        </p:nvPicPr>
+        <p:blipFill>
+          <a:blip r:embed="rId2"/>
+          <a:stretch>
+            <a:fillRect/>
+          </a:stretch>
+        </p:blipFill>
+        <p:spPr>
+          <a:xfrm>
+            <a:off x="421269" y="713232"/>
+            <a:ext cx="11349156" cy="5532120"/>
+          </a:xfrm>
+          <a:prstGeom prst="rect">
+            <a:avLst/>
+          </a:prstGeom>
+        </p:spPr>
+      </p:pic>
+      <p:sp>
+        <p:nvSpPr>
+          <p:cNvPr id="4" name="edge:caption"/>
           <p:cNvSpPr txBox="1"/>
           <p:nvPr/>
         </p:nvSpPr>
         <p:spPr>
           <a:xfrm>
-            <a:off x="822960" y="2522093"/>
-            <a:ext cx="10801807" cy="385762"/>
+            <a:off x="228600" y="6300216"/>
+            <a:ext cx="11734495" cy="310896"/>
           </a:xfrm>
           <a:prstGeom prst="rect">
             <a:avLst/>
@@ -7003,314 +6988,24 @@
           </a:bodyPr>
           <a:lstStyle/>
           <a:p>
-            <a:pPr>
-              <a:lnSpc>
-                <a:spcPct val="130000"/>
-              </a:lnSpc>
-            </a:pPr>
-            <a:r>
-              <a:rPr sz="1500">
-                <a:solidFill>
-                  <a:srgbClr val="33221E"/>
-                </a:solidFill>
-                <a:latin typeface="Avenir Next"/>
-                <a:ea typeface="Hiragino Sans"/>
-                <a:cs typeface="Hiragino Sans"/>
-              </a:rPr>
-              <a:t>min Σ C_i(P_i)、条件 Σ P_i = D。制約付き最小化なのでラグランジュの未定乗数法を使う。</a:t>
-            </a:r>
-          </a:p>
-        </p:txBody>
-      </p:sp>
-      <p:sp>
-        <p:nvSpPr>
-          <p:cNvPr id="5" name="Rectangle 4"/>
-          <p:cNvSpPr/>
-          <p:nvPr/>
-        </p:nvSpPr>
-        <p:spPr>
-          <a:xfrm>
-            <a:off x="566928" y="3059747"/>
-            <a:ext cx="11057839" cy="9525"/>
-          </a:xfrm>
-          <a:prstGeom prst="rect">
-            <a:avLst/>
-          </a:prstGeom>
-          <a:solidFill>
-            <a:srgbClr val="E5DCCE"/>
-          </a:solidFill>
-          <a:ln>
-            <a:noFill/>
-          </a:ln>
-          <a:effectLst/>
-        </p:spPr>
-        <p:style>
-          <a:lnRef idx="1">
-            <a:schemeClr val="accent1"/>
-          </a:lnRef>
-          <a:fillRef idx="3">
-            <a:schemeClr val="accent1"/>
-          </a:fillRef>
-          <a:effectRef idx="2">
-            <a:schemeClr val="accent1"/>
-          </a:effectRef>
-          <a:fontRef idx="minor">
-            <a:schemeClr val="lt1"/>
-          </a:fontRef>
-        </p:style>
-        <p:txBody>
-          <a:bodyPr rtlCol="0" anchor="ctr"/>
-          <a:lstStyle/>
-          <a:p>
             <a:pPr algn="ctr"/>
-          </a:p>
-        </p:txBody>
-      </p:sp>
-      <p:sp>
-        <p:nvSpPr>
-          <p:cNvPr id="6" name="TextBox 5"/>
-          <p:cNvSpPr txBox="1"/>
-          <p:nvPr/>
-        </p:nvSpPr>
-        <p:spPr>
-          <a:xfrm>
-            <a:off x="566928" y="3237039"/>
-            <a:ext cx="11057839" cy="254000"/>
-          </a:xfrm>
-          <a:prstGeom prst="rect">
-            <a:avLst/>
-          </a:prstGeom>
-          <a:noFill/>
-        </p:spPr>
-        <p:txBody>
-          <a:bodyPr wrap="none" lIns="0" rIns="0" tIns="0" bIns="0">
-            <a:noAutofit/>
-          </a:bodyPr>
-          <a:lstStyle/>
-          <a:p>
-            <a:r>
-              <a:rPr sz="1600" b="1">
-                <a:solidFill>
-                  <a:srgbClr val="5C7268"/>
-                </a:solidFill>
-                <a:latin typeface="Avenir Next"/>
-                <a:ea typeface="Hiragino Sans"/>
-                <a:cs typeface="Hiragino Sans"/>
-              </a:rPr>
-              <a:t>② 微分する｜L = Σ C_i(P_i) − λ(Σ P_i − D)</a:t>
-            </a:r>
-          </a:p>
-        </p:txBody>
-      </p:sp>
-      <p:sp>
-        <p:nvSpPr>
-          <p:cNvPr id="7" name="TextBox 6"/>
-          <p:cNvSpPr txBox="1"/>
-          <p:nvPr/>
-        </p:nvSpPr>
-        <p:spPr>
-          <a:xfrm>
-            <a:off x="822960" y="3529139"/>
-            <a:ext cx="10801807" cy="385762"/>
-          </a:xfrm>
-          <a:prstGeom prst="rect">
-            <a:avLst/>
-          </a:prstGeom>
-          <a:noFill/>
-        </p:spPr>
-        <p:txBody>
-          <a:bodyPr wrap="square" lIns="0" rIns="0" tIns="0" bIns="0">
-            <a:noAutofit/>
-          </a:bodyPr>
-          <a:lstStyle/>
-          <a:p>
-            <a:pPr>
-              <a:lnSpc>
-                <a:spcPct val="130000"/>
-              </a:lnSpc>
-            </a:pPr>
-            <a:r>
-              <a:rPr sz="1500">
-                <a:solidFill>
-                  <a:srgbClr val="33221E"/>
-                </a:solidFill>
-                <a:latin typeface="Avenir Next"/>
-                <a:ea typeface="Hiragino Sans"/>
-                <a:cs typeface="Hiragino Sans"/>
-              </a:rPr>
-              <a:t>P_i で偏微分して 0 と置くと </a:t>
-            </a:r>
-            <a:r>
-              <a:rPr sz="1500" b="1">
-                <a:solidFill>
-                  <a:srgbClr val="33221E"/>
-                </a:solidFill>
-                <a:latin typeface="Avenir Next"/>
-                <a:ea typeface="Hiragino Sans"/>
-                <a:cs typeface="Hiragino Sans"/>
-              </a:rPr>
-              <a:t>dC_i/dP_i = λ</a:t>
-            </a:r>
-            <a:r>
-              <a:rPr sz="1500">
-                <a:solidFill>
-                  <a:srgbClr val="33221E"/>
-                </a:solidFill>
-                <a:latin typeface="Avenir Next"/>
-                <a:ea typeface="Hiragino Sans"/>
-                <a:cs typeface="Hiragino Sans"/>
-              </a:rPr>
-              <a:t>（すべての i で同じ）。これが等 λ 条件である。</a:t>
-            </a:r>
-          </a:p>
-        </p:txBody>
-      </p:sp>
-      <p:sp>
-        <p:nvSpPr>
-          <p:cNvPr id="8" name="Rectangle 7"/>
-          <p:cNvSpPr/>
-          <p:nvPr/>
-        </p:nvSpPr>
-        <p:spPr>
-          <a:xfrm>
-            <a:off x="566928" y="4066793"/>
-            <a:ext cx="11057839" cy="9525"/>
-          </a:xfrm>
-          <a:prstGeom prst="rect">
-            <a:avLst/>
-          </a:prstGeom>
-          <a:solidFill>
-            <a:srgbClr val="E5DCCE"/>
-          </a:solidFill>
-          <a:ln>
-            <a:noFill/>
-          </a:ln>
-          <a:effectLst/>
-        </p:spPr>
-        <p:style>
-          <a:lnRef idx="1">
-            <a:schemeClr val="accent1"/>
-          </a:lnRef>
-          <a:fillRef idx="3">
-            <a:schemeClr val="accent1"/>
-          </a:fillRef>
-          <a:effectRef idx="2">
-            <a:schemeClr val="accent1"/>
-          </a:effectRef>
-          <a:fontRef idx="minor">
-            <a:schemeClr val="lt1"/>
-          </a:fontRef>
-        </p:style>
-        <p:txBody>
-          <a:bodyPr rtlCol="0" anchor="ctr"/>
-          <a:lstStyle/>
-          <a:p>
-            <a:pPr algn="ctr"/>
-          </a:p>
-        </p:txBody>
-      </p:sp>
-      <p:sp>
-        <p:nvSpPr>
-          <p:cNvPr id="9" name="build:ghost"/>
-          <p:cNvSpPr txBox="1"/>
-          <p:nvPr/>
-        </p:nvSpPr>
-        <p:spPr>
-          <a:xfrm>
-            <a:off x="566928" y="4244085"/>
-            <a:ext cx="11057839" cy="254000"/>
-          </a:xfrm>
-          <a:prstGeom prst="rect">
-            <a:avLst/>
-          </a:prstGeom>
-          <a:noFill/>
-        </p:spPr>
-        <p:txBody>
-          <a:bodyPr wrap="none" lIns="0" rIns="0" tIns="0" bIns="0">
-            <a:noAutofit/>
-          </a:bodyPr>
-          <a:lstStyle/>
-          <a:p>
-            <a:r>
-              <a:rPr sz="1600" b="1">
-                <a:solidFill>
-                  <a:srgbClr val="C1C9C5"/>
-                </a:solidFill>
-                <a:latin typeface="Avenir Next"/>
-                <a:ea typeface="Hiragino Sans"/>
-                <a:cs typeface="Hiragino Sans"/>
-              </a:rPr>
-              <a:t>③ 直感で確かめる｜λ が違えば動かす余地がある</a:t>
-            </a:r>
-          </a:p>
-        </p:txBody>
-      </p:sp>
-      <p:sp>
-        <p:nvSpPr>
-          <p:cNvPr id="10" name="build:ghost"/>
-          <p:cNvSpPr txBox="1"/>
-          <p:nvPr/>
-        </p:nvSpPr>
-        <p:spPr>
-          <a:xfrm>
-            <a:off x="822960" y="4536185"/>
-            <a:ext cx="10801807" cy="695325"/>
-          </a:xfrm>
-          <a:prstGeom prst="rect">
-            <a:avLst/>
-          </a:prstGeom>
-          <a:noFill/>
-        </p:spPr>
-        <p:txBody>
-          <a:bodyPr wrap="square" lIns="0" rIns="0" tIns="0" bIns="0">
-            <a:noAutofit/>
-          </a:bodyPr>
-          <a:lstStyle/>
-          <a:p>
-            <a:pPr>
-              <a:lnSpc>
-                <a:spcPct val="130000"/>
-              </a:lnSpc>
-            </a:pPr>
-            <a:r>
-              <a:rPr sz="1500">
-                <a:solidFill>
-                  <a:srgbClr val="C1BCBB"/>
-                </a:solidFill>
-                <a:latin typeface="Avenir Next"/>
-                <a:ea typeface="Hiragino Sans"/>
-                <a:cs typeface="Hiragino Sans"/>
-              </a:rPr>
-              <a:t>もし機 1 の λ が機 2 より高ければ、機 1 を 1 MW 減らして機 2 を 1 MW 増やすだけで総費用が下がる。</a:t>
-            </a:r>
-            <a:r>
-              <a:rPr sz="1500" b="1">
-                <a:solidFill>
-                  <a:srgbClr val="C1BCBB"/>
-                </a:solidFill>
-                <a:latin typeface="Avenir Next"/>
-                <a:ea typeface="Hiragino Sans"/>
-                <a:cs typeface="Hiragino Sans"/>
-              </a:rPr>
-              <a:t>下がらなくなる点が等しい点</a:t>
-            </a:r>
-            <a:r>
-              <a:rPr sz="1500">
-                <a:solidFill>
-                  <a:srgbClr val="C1BCBB"/>
-                </a:solidFill>
-                <a:latin typeface="Avenir Next"/>
-                <a:ea typeface="Hiragino Sans"/>
-                <a:cs typeface="Hiragino Sans"/>
-              </a:rPr>
-              <a:t>。λ は「あと 1 MWh の値段」。</a:t>
-            </a:r>
-          </a:p>
-        </p:txBody>
-      </p:sp>
-      <p:sp>
-        <p:nvSpPr>
-          <p:cNvPr id="11" name="TextBox 10"/>
+            <a:r>
+              <a:rPr sz="1400">
+                <a:solidFill>
+                  <a:srgbClr val="71635B"/>
+                </a:solidFill>
+                <a:latin typeface="Avenir Next"/>
+                <a:ea typeface="Hiragino Sans"/>
+                <a:cs typeface="Hiragino Sans"/>
+              </a:rPr>
+              <a:t>P_i で偏微分して 0 と置くと dC_i/dP_i = λ（すべての i で同じ）。これが等 λ 条件である。　出典｜コード/fig_ch14.py</a:t>
+            </a:r>
+          </a:p>
+        </p:txBody>
+      </p:sp>
+      <p:sp>
+        <p:nvSpPr>
+          <p:cNvPr id="5" name="TextBox 4"/>
           <p:cNvSpPr txBox="1"/>
           <p:nvPr/>
         </p:nvSpPr>
@@ -7366,59 +7061,14 @@
       <p:grpSpPr/>
       <p:sp>
         <p:nvSpPr>
-          <p:cNvPr id="2" name="TextBox 1"/>
+          <p:cNvPr id="2" name="edge:title"/>
           <p:cNvSpPr txBox="1"/>
           <p:nvPr/>
         </p:nvSpPr>
         <p:spPr>
           <a:xfrm>
-            <a:off x="566928" y="457200"/>
-            <a:ext cx="11057839" cy="658368"/>
-          </a:xfrm>
-          <a:prstGeom prst="rect">
-            <a:avLst/>
-          </a:prstGeom>
-          <a:noFill/>
-        </p:spPr>
-        <p:txBody>
-          <a:bodyPr wrap="square" lIns="0" rIns="0" tIns="0" bIns="0" anchor="ctr">
-            <a:noAutofit/>
-          </a:bodyPr>
-          <a:lstStyle/>
-          <a:p>
-            <a:pPr>
-              <a:lnSpc>
-                <a:spcPct val="106000"/>
-              </a:lnSpc>
-              <a:defRPr sz="3390" b="1">
-                <a:solidFill>
-                  <a:srgbClr val="7C332A"/>
-                </a:solidFill>
-                <a:latin typeface="Avenir Next"/>
-                <a:ea typeface="Hiragino Sans"/>
-                <a:cs typeface="Hiragino Sans"/>
-              </a:defRPr>
-            </a:pPr>
-            <a:r>
-              <a:rPr>
-                <a:ea typeface="Hiragino Sans"/>
-                <a:cs typeface="Hiragino Sans"/>
-              </a:rPr>
-              <a:t>導出 — 等 λ 法</a:t>
-            </a:r>
-          </a:p>
-        </p:txBody>
-      </p:sp>
-      <p:sp>
-        <p:nvSpPr>
-          <p:cNvPr id="3" name="TextBox 2"/>
-          <p:cNvSpPr txBox="1"/>
-          <p:nvPr/>
-        </p:nvSpPr>
-        <p:spPr>
-          <a:xfrm>
-            <a:off x="566928" y="2229993"/>
-            <a:ext cx="11057839" cy="254000"/>
+            <a:off x="566928" y="146304"/>
+            <a:ext cx="11057839" cy="457200"/>
           </a:xfrm>
           <a:prstGeom prst="rect">
             <a:avLst/>
@@ -7431,30 +7081,60 @@
           </a:bodyPr>
           <a:lstStyle/>
           <a:p>
-            <a:r>
-              <a:rPr sz="1600" b="1">
-                <a:solidFill>
-                  <a:srgbClr val="5C7268"/>
-                </a:solidFill>
-                <a:latin typeface="Avenir Next"/>
-                <a:ea typeface="Hiragino Sans"/>
-                <a:cs typeface="Hiragino Sans"/>
-              </a:rPr>
-              <a:t>① 問題を書く｜総費用を最小に、需給は一致</a:t>
-            </a:r>
-          </a:p>
-        </p:txBody>
-      </p:sp>
-      <p:sp>
-        <p:nvSpPr>
-          <p:cNvPr id="4" name="TextBox 3"/>
+            <a:pPr>
+              <a:defRPr sz="2400" b="1">
+                <a:solidFill>
+                  <a:srgbClr val="7C332A"/>
+                </a:solidFill>
+                <a:latin typeface="Avenir Next"/>
+                <a:ea typeface="Hiragino Sans"/>
+                <a:cs typeface="Hiragino Sans"/>
+              </a:defRPr>
+            </a:pPr>
+            <a:r>
+              <a:rPr>
+                <a:ea typeface="Hiragino Sans"/>
+                <a:cs typeface="Hiragino Sans"/>
+              </a:rPr>
+              <a:t>導出 — 等 λ 法</a:t>
+            </a:r>
+          </a:p>
+        </p:txBody>
+      </p:sp>
+      <p:pic>
+        <p:nvPicPr>
+          <p:cNvPr id="3" name="Picture 2" descr="ch14_deriv_lambda_3.png"/>
+          <p:cNvPicPr>
+            <a:picLocks noChangeAspect="1"/>
+          </p:cNvPicPr>
+          <p:nvPr/>
+        </p:nvPicPr>
+        <p:blipFill>
+          <a:blip r:embed="rId2"/>
+          <a:stretch>
+            <a:fillRect/>
+          </a:stretch>
+        </p:blipFill>
+        <p:spPr>
+          <a:xfrm>
+            <a:off x="636476" y="713232"/>
+            <a:ext cx="10918742" cy="5322316"/>
+          </a:xfrm>
+          <a:prstGeom prst="rect">
+            <a:avLst/>
+          </a:prstGeom>
+        </p:spPr>
+      </p:pic>
+      <p:sp>
+        <p:nvSpPr>
+          <p:cNvPr id="4" name="edge:caption"/>
           <p:cNvSpPr txBox="1"/>
           <p:nvPr/>
         </p:nvSpPr>
         <p:spPr>
           <a:xfrm>
-            <a:off x="822960" y="2522093"/>
-            <a:ext cx="10801807" cy="385762"/>
+            <a:off x="228600" y="6090412"/>
+            <a:ext cx="11734495" cy="520700"/>
           </a:xfrm>
           <a:prstGeom prst="rect">
             <a:avLst/>
@@ -7467,314 +7147,24 @@
           </a:bodyPr>
           <a:lstStyle/>
           <a:p>
-            <a:pPr>
-              <a:lnSpc>
-                <a:spcPct val="130000"/>
-              </a:lnSpc>
-            </a:pPr>
-            <a:r>
-              <a:rPr sz="1500">
-                <a:solidFill>
-                  <a:srgbClr val="33221E"/>
-                </a:solidFill>
-                <a:latin typeface="Avenir Next"/>
-                <a:ea typeface="Hiragino Sans"/>
-                <a:cs typeface="Hiragino Sans"/>
-              </a:rPr>
-              <a:t>min Σ C_i(P_i)、条件 Σ P_i = D。制約付き最小化なのでラグランジュの未定乗数法を使う。</a:t>
-            </a:r>
-          </a:p>
-        </p:txBody>
-      </p:sp>
-      <p:sp>
-        <p:nvSpPr>
-          <p:cNvPr id="5" name="Rectangle 4"/>
-          <p:cNvSpPr/>
-          <p:nvPr/>
-        </p:nvSpPr>
-        <p:spPr>
-          <a:xfrm>
-            <a:off x="566928" y="3059747"/>
-            <a:ext cx="11057839" cy="9525"/>
-          </a:xfrm>
-          <a:prstGeom prst="rect">
-            <a:avLst/>
-          </a:prstGeom>
-          <a:solidFill>
-            <a:srgbClr val="E5DCCE"/>
-          </a:solidFill>
-          <a:ln>
-            <a:noFill/>
-          </a:ln>
-          <a:effectLst/>
-        </p:spPr>
-        <p:style>
-          <a:lnRef idx="1">
-            <a:schemeClr val="accent1"/>
-          </a:lnRef>
-          <a:fillRef idx="3">
-            <a:schemeClr val="accent1"/>
-          </a:fillRef>
-          <a:effectRef idx="2">
-            <a:schemeClr val="accent1"/>
-          </a:effectRef>
-          <a:fontRef idx="minor">
-            <a:schemeClr val="lt1"/>
-          </a:fontRef>
-        </p:style>
-        <p:txBody>
-          <a:bodyPr rtlCol="0" anchor="ctr"/>
-          <a:lstStyle/>
-          <a:p>
             <a:pPr algn="ctr"/>
-          </a:p>
-        </p:txBody>
-      </p:sp>
-      <p:sp>
-        <p:nvSpPr>
-          <p:cNvPr id="6" name="TextBox 5"/>
-          <p:cNvSpPr txBox="1"/>
-          <p:nvPr/>
-        </p:nvSpPr>
-        <p:spPr>
-          <a:xfrm>
-            <a:off x="566928" y="3237039"/>
-            <a:ext cx="11057839" cy="254000"/>
-          </a:xfrm>
-          <a:prstGeom prst="rect">
-            <a:avLst/>
-          </a:prstGeom>
-          <a:noFill/>
-        </p:spPr>
-        <p:txBody>
-          <a:bodyPr wrap="none" lIns="0" rIns="0" tIns="0" bIns="0">
-            <a:noAutofit/>
-          </a:bodyPr>
-          <a:lstStyle/>
-          <a:p>
-            <a:r>
-              <a:rPr sz="1600" b="1">
-                <a:solidFill>
-                  <a:srgbClr val="5C7268"/>
-                </a:solidFill>
-                <a:latin typeface="Avenir Next"/>
-                <a:ea typeface="Hiragino Sans"/>
-                <a:cs typeface="Hiragino Sans"/>
-              </a:rPr>
-              <a:t>② 微分する｜L = Σ C_i(P_i) − λ(Σ P_i − D)</a:t>
-            </a:r>
-          </a:p>
-        </p:txBody>
-      </p:sp>
-      <p:sp>
-        <p:nvSpPr>
-          <p:cNvPr id="7" name="TextBox 6"/>
-          <p:cNvSpPr txBox="1"/>
-          <p:nvPr/>
-        </p:nvSpPr>
-        <p:spPr>
-          <a:xfrm>
-            <a:off x="822960" y="3529139"/>
-            <a:ext cx="10801807" cy="385762"/>
-          </a:xfrm>
-          <a:prstGeom prst="rect">
-            <a:avLst/>
-          </a:prstGeom>
-          <a:noFill/>
-        </p:spPr>
-        <p:txBody>
-          <a:bodyPr wrap="square" lIns="0" rIns="0" tIns="0" bIns="0">
-            <a:noAutofit/>
-          </a:bodyPr>
-          <a:lstStyle/>
-          <a:p>
-            <a:pPr>
-              <a:lnSpc>
-                <a:spcPct val="130000"/>
-              </a:lnSpc>
-            </a:pPr>
-            <a:r>
-              <a:rPr sz="1500">
-                <a:solidFill>
-                  <a:srgbClr val="33221E"/>
-                </a:solidFill>
-                <a:latin typeface="Avenir Next"/>
-                <a:ea typeface="Hiragino Sans"/>
-                <a:cs typeface="Hiragino Sans"/>
-              </a:rPr>
-              <a:t>P_i で偏微分して 0 と置くと </a:t>
-            </a:r>
-            <a:r>
-              <a:rPr sz="1500" b="1">
-                <a:solidFill>
-                  <a:srgbClr val="33221E"/>
-                </a:solidFill>
-                <a:latin typeface="Avenir Next"/>
-                <a:ea typeface="Hiragino Sans"/>
-                <a:cs typeface="Hiragino Sans"/>
-              </a:rPr>
-              <a:t>dC_i/dP_i = λ</a:t>
-            </a:r>
-            <a:r>
-              <a:rPr sz="1500">
-                <a:solidFill>
-                  <a:srgbClr val="33221E"/>
-                </a:solidFill>
-                <a:latin typeface="Avenir Next"/>
-                <a:ea typeface="Hiragino Sans"/>
-                <a:cs typeface="Hiragino Sans"/>
-              </a:rPr>
-              <a:t>（すべての i で同じ）。これが等 λ 条件である。</a:t>
-            </a:r>
-          </a:p>
-        </p:txBody>
-      </p:sp>
-      <p:sp>
-        <p:nvSpPr>
-          <p:cNvPr id="8" name="Rectangle 7"/>
-          <p:cNvSpPr/>
-          <p:nvPr/>
-        </p:nvSpPr>
-        <p:spPr>
-          <a:xfrm>
-            <a:off x="566928" y="4066793"/>
-            <a:ext cx="11057839" cy="9525"/>
-          </a:xfrm>
-          <a:prstGeom prst="rect">
-            <a:avLst/>
-          </a:prstGeom>
-          <a:solidFill>
-            <a:srgbClr val="E5DCCE"/>
-          </a:solidFill>
-          <a:ln>
-            <a:noFill/>
-          </a:ln>
-          <a:effectLst/>
-        </p:spPr>
-        <p:style>
-          <a:lnRef idx="1">
-            <a:schemeClr val="accent1"/>
-          </a:lnRef>
-          <a:fillRef idx="3">
-            <a:schemeClr val="accent1"/>
-          </a:fillRef>
-          <a:effectRef idx="2">
-            <a:schemeClr val="accent1"/>
-          </a:effectRef>
-          <a:fontRef idx="minor">
-            <a:schemeClr val="lt1"/>
-          </a:fontRef>
-        </p:style>
-        <p:txBody>
-          <a:bodyPr rtlCol="0" anchor="ctr"/>
-          <a:lstStyle/>
-          <a:p>
-            <a:pPr algn="ctr"/>
-          </a:p>
-        </p:txBody>
-      </p:sp>
-      <p:sp>
-        <p:nvSpPr>
-          <p:cNvPr id="9" name="TextBox 8"/>
-          <p:cNvSpPr txBox="1"/>
-          <p:nvPr/>
-        </p:nvSpPr>
-        <p:spPr>
-          <a:xfrm>
-            <a:off x="566928" y="4244085"/>
-            <a:ext cx="11057839" cy="254000"/>
-          </a:xfrm>
-          <a:prstGeom prst="rect">
-            <a:avLst/>
-          </a:prstGeom>
-          <a:noFill/>
-        </p:spPr>
-        <p:txBody>
-          <a:bodyPr wrap="none" lIns="0" rIns="0" tIns="0" bIns="0">
-            <a:noAutofit/>
-          </a:bodyPr>
-          <a:lstStyle/>
-          <a:p>
-            <a:r>
-              <a:rPr sz="1600" b="1">
-                <a:solidFill>
-                  <a:srgbClr val="5C7268"/>
-                </a:solidFill>
-                <a:latin typeface="Avenir Next"/>
-                <a:ea typeface="Hiragino Sans"/>
-                <a:cs typeface="Hiragino Sans"/>
-              </a:rPr>
-              <a:t>③ 直感で確かめる｜λ が違えば動かす余地がある</a:t>
-            </a:r>
-          </a:p>
-        </p:txBody>
-      </p:sp>
-      <p:sp>
-        <p:nvSpPr>
-          <p:cNvPr id="10" name="TextBox 9"/>
-          <p:cNvSpPr txBox="1"/>
-          <p:nvPr/>
-        </p:nvSpPr>
-        <p:spPr>
-          <a:xfrm>
-            <a:off x="822960" y="4536185"/>
-            <a:ext cx="10801807" cy="695325"/>
-          </a:xfrm>
-          <a:prstGeom prst="rect">
-            <a:avLst/>
-          </a:prstGeom>
-          <a:noFill/>
-        </p:spPr>
-        <p:txBody>
-          <a:bodyPr wrap="square" lIns="0" rIns="0" tIns="0" bIns="0">
-            <a:noAutofit/>
-          </a:bodyPr>
-          <a:lstStyle/>
-          <a:p>
-            <a:pPr>
-              <a:lnSpc>
-                <a:spcPct val="130000"/>
-              </a:lnSpc>
-            </a:pPr>
-            <a:r>
-              <a:rPr sz="1500">
-                <a:solidFill>
-                  <a:srgbClr val="33221E"/>
-                </a:solidFill>
-                <a:latin typeface="Avenir Next"/>
-                <a:ea typeface="Hiragino Sans"/>
-                <a:cs typeface="Hiragino Sans"/>
-              </a:rPr>
-              <a:t>もし機 1 の λ が機 2 より高ければ、機 1 を 1 MW 減らして機 2 を 1 MW 増やすだけで総費用が下がる。</a:t>
-            </a:r>
-            <a:r>
-              <a:rPr sz="1500" b="1">
-                <a:solidFill>
-                  <a:srgbClr val="33221E"/>
-                </a:solidFill>
-                <a:latin typeface="Avenir Next"/>
-                <a:ea typeface="Hiragino Sans"/>
-                <a:cs typeface="Hiragino Sans"/>
-              </a:rPr>
-              <a:t>下がらなくなる点が等しい点</a:t>
-            </a:r>
-            <a:r>
-              <a:rPr sz="1500">
-                <a:solidFill>
-                  <a:srgbClr val="33221E"/>
-                </a:solidFill>
-                <a:latin typeface="Avenir Next"/>
-                <a:ea typeface="Hiragino Sans"/>
-                <a:cs typeface="Hiragino Sans"/>
-              </a:rPr>
-              <a:t>。λ は「あと 1 MWh の値段」。</a:t>
-            </a:r>
-          </a:p>
-        </p:txBody>
-      </p:sp>
-      <p:sp>
-        <p:nvSpPr>
-          <p:cNvPr id="11" name="TextBox 10"/>
+            <a:r>
+              <a:rPr sz="1400">
+                <a:solidFill>
+                  <a:srgbClr val="71635B"/>
+                </a:solidFill>
+                <a:latin typeface="Avenir Next"/>
+                <a:ea typeface="Hiragino Sans"/>
+                <a:cs typeface="Hiragino Sans"/>
+              </a:rPr>
+              <a:t>もし機 1 の λ が機 2 より高ければ、機 1 を 1 MW 減らして機 2 を 1 MW 増やすだけで総費用が下がる。下がらなくなる点が等しい点。λ は「あと 1 MWh の値段」。　出典｜コード/fig_ch14.py</a:t>
+            </a:r>
+          </a:p>
+        </p:txBody>
+      </p:sp>
+      <p:sp>
+        <p:nvSpPr>
+          <p:cNvPr id="5" name="TextBox 4"/>
           <p:cNvSpPr txBox="1"/>
           <p:nvPr/>
         </p:nvSpPr>
@@ -11652,59 +11042,14 @@
       <p:grpSpPr/>
       <p:sp>
         <p:nvSpPr>
-          <p:cNvPr id="2" name="TextBox 1"/>
+          <p:cNvPr id="2" name="edge:title"/>
           <p:cNvSpPr txBox="1"/>
           <p:nvPr/>
         </p:nvSpPr>
         <p:spPr>
           <a:xfrm>
-            <a:off x="566928" y="457200"/>
-            <a:ext cx="11057839" cy="658368"/>
-          </a:xfrm>
-          <a:prstGeom prst="rect">
-            <a:avLst/>
-          </a:prstGeom>
-          <a:noFill/>
-        </p:spPr>
-        <p:txBody>
-          <a:bodyPr wrap="square" lIns="0" rIns="0" tIns="0" bIns="0" anchor="ctr">
-            <a:noAutofit/>
-          </a:bodyPr>
-          <a:lstStyle/>
-          <a:p>
-            <a:pPr>
-              <a:lnSpc>
-                <a:spcPct val="106000"/>
-              </a:lnSpc>
-              <a:defRPr sz="3390" b="1">
-                <a:solidFill>
-                  <a:srgbClr val="7C332A"/>
-                </a:solidFill>
-                <a:latin typeface="Avenir Next"/>
-                <a:ea typeface="Hiragino Sans"/>
-                <a:cs typeface="Hiragino Sans"/>
-              </a:defRPr>
-            </a:pPr>
-            <a:r>
-              <a:rPr>
-                <a:ea typeface="Hiragino Sans"/>
-                <a:cs typeface="Hiragino Sans"/>
-              </a:rPr>
-              <a:t>導出 — LMP はなぜ地点で違うのか</a:t>
-            </a:r>
-          </a:p>
-        </p:txBody>
-      </p:sp>
-      <p:sp>
-        <p:nvSpPr>
-          <p:cNvPr id="3" name="TextBox 2"/>
-          <p:cNvSpPr txBox="1"/>
-          <p:nvPr/>
-        </p:nvSpPr>
-        <p:spPr>
-          <a:xfrm>
-            <a:off x="566928" y="2075212"/>
-            <a:ext cx="11057839" cy="254000"/>
+            <a:off x="566928" y="146304"/>
+            <a:ext cx="11057839" cy="457200"/>
           </a:xfrm>
           <a:prstGeom prst="rect">
             <a:avLst/>
@@ -11717,30 +11062,60 @@
           </a:bodyPr>
           <a:lstStyle/>
           <a:p>
-            <a:r>
-              <a:rPr sz="1600" b="1">
-                <a:solidFill>
-                  <a:srgbClr val="5C7268"/>
-                </a:solidFill>
-                <a:latin typeface="Avenir Next"/>
-                <a:ea typeface="Hiragino Sans"/>
-                <a:cs typeface="Hiragino Sans"/>
-              </a:rPr>
-              <a:t>① LMP の定義｜その地点で需要を 1 MW 増やしたときの総費用の増分</a:t>
-            </a:r>
-          </a:p>
-        </p:txBody>
-      </p:sp>
-      <p:sp>
-        <p:nvSpPr>
-          <p:cNvPr id="4" name="TextBox 3"/>
+            <a:pPr>
+              <a:defRPr sz="2400" b="1">
+                <a:solidFill>
+                  <a:srgbClr val="7C332A"/>
+                </a:solidFill>
+                <a:latin typeface="Avenir Next"/>
+                <a:ea typeface="Hiragino Sans"/>
+                <a:cs typeface="Hiragino Sans"/>
+              </a:defRPr>
+            </a:pPr>
+            <a:r>
+              <a:rPr>
+                <a:ea typeface="Hiragino Sans"/>
+                <a:cs typeface="Hiragino Sans"/>
+              </a:rPr>
+              <a:t>導出 — LMP はなぜ地点で違うのか</a:t>
+            </a:r>
+          </a:p>
+        </p:txBody>
+      </p:sp>
+      <p:pic>
+        <p:nvPicPr>
+          <p:cNvPr id="3" name="Picture 2" descr="ch14_deriv_lmp_1.png"/>
+          <p:cNvPicPr>
+            <a:picLocks noChangeAspect="1"/>
+          </p:cNvPicPr>
+          <p:nvPr/>
+        </p:nvPicPr>
+        <p:blipFill>
+          <a:blip r:embed="rId2"/>
+          <a:stretch>
+            <a:fillRect/>
+          </a:stretch>
+        </p:blipFill>
+        <p:spPr>
+          <a:xfrm>
+            <a:off x="228600" y="730157"/>
+            <a:ext cx="11734495" cy="5288466"/>
+          </a:xfrm>
+          <a:prstGeom prst="rect">
+            <a:avLst/>
+          </a:prstGeom>
+        </p:spPr>
+      </p:pic>
+      <p:sp>
+        <p:nvSpPr>
+          <p:cNvPr id="4" name="edge:caption"/>
           <p:cNvSpPr txBox="1"/>
           <p:nvPr/>
         </p:nvSpPr>
         <p:spPr>
           <a:xfrm>
-            <a:off x="822960" y="2367312"/>
-            <a:ext cx="10801807" cy="695325"/>
+            <a:off x="228600" y="6090412"/>
+            <a:ext cx="11734495" cy="520700"/>
           </a:xfrm>
           <a:prstGeom prst="rect">
             <a:avLst/>
@@ -11753,336 +11128,24 @@
           </a:bodyPr>
           <a:lstStyle/>
           <a:p>
-            <a:pPr>
-              <a:lnSpc>
-                <a:spcPct val="130000"/>
-              </a:lnSpc>
-            </a:pPr>
-            <a:r>
-              <a:rPr sz="1500">
-                <a:solidFill>
-                  <a:srgbClr val="33221E"/>
-                </a:solidFill>
-                <a:latin typeface="Avenir Next"/>
-                <a:ea typeface="Hiragino Sans"/>
-                <a:cs typeface="Hiragino Sans"/>
-              </a:rPr>
-              <a:t>λ と同じ考え方を「地点ごと」に適用する。混雑がなければ、どの地点で増やしても同じ機が応じるので </a:t>
-            </a:r>
-            <a:r>
-              <a:rPr sz="1500" b="1">
-                <a:solidFill>
-                  <a:srgbClr val="33221E"/>
-                </a:solidFill>
-                <a:latin typeface="Avenir Next"/>
-                <a:ea typeface="Hiragino Sans"/>
-                <a:cs typeface="Hiragino Sans"/>
-              </a:rPr>
-              <a:t>全地点で同じ値</a:t>
-            </a:r>
-            <a:r>
-              <a:rPr sz="1500">
-                <a:solidFill>
-                  <a:srgbClr val="33221E"/>
-                </a:solidFill>
-                <a:latin typeface="Avenir Next"/>
-                <a:ea typeface="Hiragino Sans"/>
-                <a:cs typeface="Hiragino Sans"/>
-              </a:rPr>
-              <a:t>になる。</a:t>
-            </a:r>
-          </a:p>
-        </p:txBody>
-      </p:sp>
-      <p:sp>
-        <p:nvSpPr>
-          <p:cNvPr id="5" name="Rectangle 4"/>
-          <p:cNvSpPr/>
-          <p:nvPr/>
-        </p:nvSpPr>
-        <p:spPr>
-          <a:xfrm>
-            <a:off x="566928" y="3214529"/>
-            <a:ext cx="11057839" cy="9525"/>
-          </a:xfrm>
-          <a:prstGeom prst="rect">
-            <a:avLst/>
-          </a:prstGeom>
-          <a:solidFill>
-            <a:srgbClr val="E5DCCE"/>
-          </a:solidFill>
-          <a:ln>
-            <a:noFill/>
-          </a:ln>
-          <a:effectLst/>
-        </p:spPr>
-        <p:style>
-          <a:lnRef idx="1">
-            <a:schemeClr val="accent1"/>
-          </a:lnRef>
-          <a:fillRef idx="3">
-            <a:schemeClr val="accent1"/>
-          </a:fillRef>
-          <a:effectRef idx="2">
-            <a:schemeClr val="accent1"/>
-          </a:effectRef>
-          <a:fontRef idx="minor">
-            <a:schemeClr val="lt1"/>
-          </a:fontRef>
-        </p:style>
-        <p:txBody>
-          <a:bodyPr rtlCol="0" anchor="ctr"/>
-          <a:lstStyle/>
-          <a:p>
             <a:pPr algn="ctr"/>
-          </a:p>
-        </p:txBody>
-      </p:sp>
-      <p:sp>
-        <p:nvSpPr>
-          <p:cNvPr id="6" name="build:ghost"/>
-          <p:cNvSpPr txBox="1"/>
-          <p:nvPr/>
-        </p:nvSpPr>
-        <p:spPr>
-          <a:xfrm>
-            <a:off x="566928" y="3391821"/>
-            <a:ext cx="11057839" cy="254000"/>
-          </a:xfrm>
-          <a:prstGeom prst="rect">
-            <a:avLst/>
-          </a:prstGeom>
-          <a:noFill/>
-        </p:spPr>
-        <p:txBody>
-          <a:bodyPr wrap="none" lIns="0" rIns="0" tIns="0" bIns="0">
-            <a:noAutofit/>
-          </a:bodyPr>
-          <a:lstStyle/>
-          <a:p>
-            <a:r>
-              <a:rPr sz="1600" b="1">
-                <a:solidFill>
-                  <a:srgbClr val="C1C9C5"/>
-                </a:solidFill>
-                <a:latin typeface="Avenir Next"/>
-                <a:ea typeface="Hiragino Sans"/>
-                <a:cs typeface="Hiragino Sans"/>
-              </a:rPr>
-              <a:t>② 混雑すると届かない｜安い電気が入ってこられない</a:t>
-            </a:r>
-          </a:p>
-        </p:txBody>
-      </p:sp>
-      <p:sp>
-        <p:nvSpPr>
-          <p:cNvPr id="7" name="build:ghost"/>
-          <p:cNvSpPr txBox="1"/>
-          <p:nvPr/>
-        </p:nvSpPr>
-        <p:spPr>
-          <a:xfrm>
-            <a:off x="822960" y="3683921"/>
-            <a:ext cx="10801807" cy="385762"/>
-          </a:xfrm>
-          <a:prstGeom prst="rect">
-            <a:avLst/>
-          </a:prstGeom>
-          <a:noFill/>
-        </p:spPr>
-        <p:txBody>
-          <a:bodyPr wrap="square" lIns="0" rIns="0" tIns="0" bIns="0">
-            <a:noAutofit/>
-          </a:bodyPr>
-          <a:lstStyle/>
-          <a:p>
-            <a:pPr>
-              <a:lnSpc>
-                <a:spcPct val="130000"/>
-              </a:lnSpc>
-            </a:pPr>
-            <a:r>
-              <a:rPr sz="1500">
-                <a:solidFill>
-                  <a:srgbClr val="C1BCBB"/>
-                </a:solidFill>
-                <a:latin typeface="Avenir Next"/>
-                <a:ea typeface="Hiragino Sans"/>
-                <a:cs typeface="Hiragino Sans"/>
-              </a:rPr>
-              <a:t>線路が満杯だと、その先で 1 MW 増やす需要は</a:t>
-            </a:r>
-            <a:r>
-              <a:rPr sz="1500" b="1">
-                <a:solidFill>
-                  <a:srgbClr val="C1BCBB"/>
-                </a:solidFill>
-                <a:latin typeface="Avenir Next"/>
-                <a:ea typeface="Hiragino Sans"/>
-                <a:cs typeface="Hiragino Sans"/>
-              </a:rPr>
-              <a:t>その地点側の高い電源</a:t>
-            </a:r>
-            <a:r>
-              <a:rPr sz="1500">
-                <a:solidFill>
-                  <a:srgbClr val="C1BCBB"/>
-                </a:solidFill>
-                <a:latin typeface="Avenir Next"/>
-                <a:ea typeface="Hiragino Sans"/>
-                <a:cs typeface="Hiragino Sans"/>
-              </a:rPr>
-              <a:t>で賄うしかない。だから LMP がそこだけ上がる。</a:t>
-            </a:r>
-          </a:p>
-        </p:txBody>
-      </p:sp>
-      <p:sp>
-        <p:nvSpPr>
-          <p:cNvPr id="8" name="Rectangle 7"/>
-          <p:cNvSpPr/>
-          <p:nvPr/>
-        </p:nvSpPr>
-        <p:spPr>
-          <a:xfrm>
-            <a:off x="566928" y="4221575"/>
-            <a:ext cx="11057839" cy="9525"/>
-          </a:xfrm>
-          <a:prstGeom prst="rect">
-            <a:avLst/>
-          </a:prstGeom>
-          <a:solidFill>
-            <a:srgbClr val="E5DCCE"/>
-          </a:solidFill>
-          <a:ln>
-            <a:noFill/>
-          </a:ln>
-          <a:effectLst/>
-        </p:spPr>
-        <p:style>
-          <a:lnRef idx="1">
-            <a:schemeClr val="accent1"/>
-          </a:lnRef>
-          <a:fillRef idx="3">
-            <a:schemeClr val="accent1"/>
-          </a:fillRef>
-          <a:effectRef idx="2">
-            <a:schemeClr val="accent1"/>
-          </a:effectRef>
-          <a:fontRef idx="minor">
-            <a:schemeClr val="lt1"/>
-          </a:fontRef>
-        </p:style>
-        <p:txBody>
-          <a:bodyPr rtlCol="0" anchor="ctr"/>
-          <a:lstStyle/>
-          <a:p>
-            <a:pPr algn="ctr"/>
-          </a:p>
-        </p:txBody>
-      </p:sp>
-      <p:sp>
-        <p:nvSpPr>
-          <p:cNvPr id="9" name="build:ghost"/>
-          <p:cNvSpPr txBox="1"/>
-          <p:nvPr/>
-        </p:nvSpPr>
-        <p:spPr>
-          <a:xfrm>
-            <a:off x="566928" y="4398867"/>
-            <a:ext cx="11057839" cy="254000"/>
-          </a:xfrm>
-          <a:prstGeom prst="rect">
-            <a:avLst/>
-          </a:prstGeom>
-          <a:noFill/>
-        </p:spPr>
-        <p:txBody>
-          <a:bodyPr wrap="none" lIns="0" rIns="0" tIns="0" bIns="0">
-            <a:noAutofit/>
-          </a:bodyPr>
-          <a:lstStyle/>
-          <a:p>
-            <a:r>
-              <a:rPr sz="1600" b="1">
-                <a:solidFill>
-                  <a:srgbClr val="C1C9C5"/>
-                </a:solidFill>
-                <a:latin typeface="Avenir Next"/>
-                <a:ea typeface="Hiragino Sans"/>
-                <a:cs typeface="Hiragino Sans"/>
-              </a:rPr>
-              <a:t>③ 分解すると 3 成分｜LMP = λ + 混雑 + 損失</a:t>
-            </a:r>
-          </a:p>
-        </p:txBody>
-      </p:sp>
-      <p:sp>
-        <p:nvSpPr>
-          <p:cNvPr id="10" name="build:ghost"/>
-          <p:cNvSpPr txBox="1"/>
-          <p:nvPr/>
-        </p:nvSpPr>
-        <p:spPr>
-          <a:xfrm>
-            <a:off x="822960" y="4690967"/>
-            <a:ext cx="10801807" cy="695325"/>
-          </a:xfrm>
-          <a:prstGeom prst="rect">
-            <a:avLst/>
-          </a:prstGeom>
-          <a:noFill/>
-        </p:spPr>
-        <p:txBody>
-          <a:bodyPr wrap="square" lIns="0" rIns="0" tIns="0" bIns="0">
-            <a:noAutofit/>
-          </a:bodyPr>
-          <a:lstStyle/>
-          <a:p>
-            <a:pPr>
-              <a:lnSpc>
-                <a:spcPct val="130000"/>
-              </a:lnSpc>
-            </a:pPr>
-            <a:r>
-              <a:rPr sz="1500">
-                <a:solidFill>
-                  <a:srgbClr val="C1BCBB"/>
-                </a:solidFill>
-                <a:latin typeface="Avenir Next"/>
-                <a:ea typeface="Hiragino Sans"/>
-                <a:cs typeface="Hiragino Sans"/>
-              </a:rPr>
-              <a:t>系統全体の λ に、混雑成分と損失成分が地点ごとに乗る。</a:t>
-            </a:r>
-            <a:r>
-              <a:rPr sz="1500" b="1">
-                <a:solidFill>
-                  <a:srgbClr val="C1BCBB"/>
-                </a:solidFill>
-                <a:latin typeface="Avenir Next"/>
-                <a:ea typeface="Hiragino Sans"/>
-                <a:cs typeface="Hiragino Sans"/>
-              </a:rPr>
-              <a:t>混雑レント = (LMP差) × 潮流</a:t>
-            </a:r>
-            <a:r>
-              <a:rPr sz="1500">
-                <a:solidFill>
-                  <a:srgbClr val="C1BCBB"/>
-                </a:solidFill>
-                <a:latin typeface="Avenir Next"/>
-                <a:ea typeface="Hiragino Sans"/>
-                <a:cs typeface="Hiragino Sans"/>
-              </a:rPr>
-              <a:t> が、送電線を増強する価値の目安になる。</a:t>
-            </a:r>
-          </a:p>
-        </p:txBody>
-      </p:sp>
-      <p:sp>
-        <p:nvSpPr>
-          <p:cNvPr id="11" name="TextBox 10"/>
+            <a:r>
+              <a:rPr sz="1400">
+                <a:solidFill>
+                  <a:srgbClr val="71635B"/>
+                </a:solidFill>
+                <a:latin typeface="Avenir Next"/>
+                <a:ea typeface="Hiragino Sans"/>
+                <a:cs typeface="Hiragino Sans"/>
+              </a:rPr>
+              <a:t>λ と同じ考え方を「地点ごと」に適用する。混雑がなければ、どの地点で増やしても同じ機が応じるので 全地点で同じ値になる。　出典｜コード/fig_ch14.py</a:t>
+            </a:r>
+          </a:p>
+        </p:txBody>
+      </p:sp>
+      <p:sp>
+        <p:nvSpPr>
+          <p:cNvPr id="5" name="TextBox 4"/>
           <p:cNvSpPr txBox="1"/>
           <p:nvPr/>
         </p:nvSpPr>
@@ -12138,59 +11201,14 @@
       <p:grpSpPr/>
       <p:sp>
         <p:nvSpPr>
-          <p:cNvPr id="2" name="TextBox 1"/>
+          <p:cNvPr id="2" name="edge:title"/>
           <p:cNvSpPr txBox="1"/>
           <p:nvPr/>
         </p:nvSpPr>
         <p:spPr>
           <a:xfrm>
-            <a:off x="566928" y="457200"/>
-            <a:ext cx="11057839" cy="658368"/>
-          </a:xfrm>
-          <a:prstGeom prst="rect">
-            <a:avLst/>
-          </a:prstGeom>
-          <a:noFill/>
-        </p:spPr>
-        <p:txBody>
-          <a:bodyPr wrap="square" lIns="0" rIns="0" tIns="0" bIns="0" anchor="ctr">
-            <a:noAutofit/>
-          </a:bodyPr>
-          <a:lstStyle/>
-          <a:p>
-            <a:pPr>
-              <a:lnSpc>
-                <a:spcPct val="106000"/>
-              </a:lnSpc>
-              <a:defRPr sz="3390" b="1">
-                <a:solidFill>
-                  <a:srgbClr val="7C332A"/>
-                </a:solidFill>
-                <a:latin typeface="Avenir Next"/>
-                <a:ea typeface="Hiragino Sans"/>
-                <a:cs typeface="Hiragino Sans"/>
-              </a:defRPr>
-            </a:pPr>
-            <a:r>
-              <a:rPr>
-                <a:ea typeface="Hiragino Sans"/>
-                <a:cs typeface="Hiragino Sans"/>
-              </a:rPr>
-              <a:t>導出 — LMP はなぜ地点で違うのか</a:t>
-            </a:r>
-          </a:p>
-        </p:txBody>
-      </p:sp>
-      <p:sp>
-        <p:nvSpPr>
-          <p:cNvPr id="3" name="TextBox 2"/>
-          <p:cNvSpPr txBox="1"/>
-          <p:nvPr/>
-        </p:nvSpPr>
-        <p:spPr>
-          <a:xfrm>
-            <a:off x="566928" y="2075212"/>
-            <a:ext cx="11057839" cy="254000"/>
+            <a:off x="566928" y="146304"/>
+            <a:ext cx="11057839" cy="457200"/>
           </a:xfrm>
           <a:prstGeom prst="rect">
             <a:avLst/>
@@ -12203,30 +11221,60 @@
           </a:bodyPr>
           <a:lstStyle/>
           <a:p>
-            <a:r>
-              <a:rPr sz="1600" b="1">
-                <a:solidFill>
-                  <a:srgbClr val="5C7268"/>
-                </a:solidFill>
-                <a:latin typeface="Avenir Next"/>
-                <a:ea typeface="Hiragino Sans"/>
-                <a:cs typeface="Hiragino Sans"/>
-              </a:rPr>
-              <a:t>① LMP の定義｜その地点で需要を 1 MW 増やしたときの総費用の増分</a:t>
-            </a:r>
-          </a:p>
-        </p:txBody>
-      </p:sp>
-      <p:sp>
-        <p:nvSpPr>
-          <p:cNvPr id="4" name="TextBox 3"/>
+            <a:pPr>
+              <a:defRPr sz="2400" b="1">
+                <a:solidFill>
+                  <a:srgbClr val="7C332A"/>
+                </a:solidFill>
+                <a:latin typeface="Avenir Next"/>
+                <a:ea typeface="Hiragino Sans"/>
+                <a:cs typeface="Hiragino Sans"/>
+              </a:defRPr>
+            </a:pPr>
+            <a:r>
+              <a:rPr>
+                <a:ea typeface="Hiragino Sans"/>
+                <a:cs typeface="Hiragino Sans"/>
+              </a:rPr>
+              <a:t>導出 — LMP はなぜ地点で違うのか</a:t>
+            </a:r>
+          </a:p>
+        </p:txBody>
+      </p:sp>
+      <p:pic>
+        <p:nvPicPr>
+          <p:cNvPr id="3" name="Picture 2" descr="ch14_deriv_lmp_2.png"/>
+          <p:cNvPicPr>
+            <a:picLocks noChangeAspect="1"/>
+          </p:cNvPicPr>
+          <p:nvPr/>
+        </p:nvPicPr>
+        <p:blipFill>
+          <a:blip r:embed="rId2"/>
+          <a:stretch>
+            <a:fillRect/>
+          </a:stretch>
+        </p:blipFill>
+        <p:spPr>
+          <a:xfrm>
+            <a:off x="228600" y="730157"/>
+            <a:ext cx="11734495" cy="5288466"/>
+          </a:xfrm>
+          <a:prstGeom prst="rect">
+            <a:avLst/>
+          </a:prstGeom>
+        </p:spPr>
+      </p:pic>
+      <p:sp>
+        <p:nvSpPr>
+          <p:cNvPr id="4" name="edge:caption"/>
           <p:cNvSpPr txBox="1"/>
           <p:nvPr/>
         </p:nvSpPr>
         <p:spPr>
           <a:xfrm>
-            <a:off x="822960" y="2367312"/>
-            <a:ext cx="10801807" cy="695325"/>
+            <a:off x="228600" y="6090412"/>
+            <a:ext cx="11734495" cy="520700"/>
           </a:xfrm>
           <a:prstGeom prst="rect">
             <a:avLst/>
@@ -12239,336 +11287,24 @@
           </a:bodyPr>
           <a:lstStyle/>
           <a:p>
-            <a:pPr>
-              <a:lnSpc>
-                <a:spcPct val="130000"/>
-              </a:lnSpc>
-            </a:pPr>
-            <a:r>
-              <a:rPr sz="1500">
-                <a:solidFill>
-                  <a:srgbClr val="33221E"/>
-                </a:solidFill>
-                <a:latin typeface="Avenir Next"/>
-                <a:ea typeface="Hiragino Sans"/>
-                <a:cs typeface="Hiragino Sans"/>
-              </a:rPr>
-              <a:t>λ と同じ考え方を「地点ごと」に適用する。混雑がなければ、どの地点で増やしても同じ機が応じるので </a:t>
-            </a:r>
-            <a:r>
-              <a:rPr sz="1500" b="1">
-                <a:solidFill>
-                  <a:srgbClr val="33221E"/>
-                </a:solidFill>
-                <a:latin typeface="Avenir Next"/>
-                <a:ea typeface="Hiragino Sans"/>
-                <a:cs typeface="Hiragino Sans"/>
-              </a:rPr>
-              <a:t>全地点で同じ値</a:t>
-            </a:r>
-            <a:r>
-              <a:rPr sz="1500">
-                <a:solidFill>
-                  <a:srgbClr val="33221E"/>
-                </a:solidFill>
-                <a:latin typeface="Avenir Next"/>
-                <a:ea typeface="Hiragino Sans"/>
-                <a:cs typeface="Hiragino Sans"/>
-              </a:rPr>
-              <a:t>になる。</a:t>
-            </a:r>
-          </a:p>
-        </p:txBody>
-      </p:sp>
-      <p:sp>
-        <p:nvSpPr>
-          <p:cNvPr id="5" name="Rectangle 4"/>
-          <p:cNvSpPr/>
-          <p:nvPr/>
-        </p:nvSpPr>
-        <p:spPr>
-          <a:xfrm>
-            <a:off x="566928" y="3214529"/>
-            <a:ext cx="11057839" cy="9525"/>
-          </a:xfrm>
-          <a:prstGeom prst="rect">
-            <a:avLst/>
-          </a:prstGeom>
-          <a:solidFill>
-            <a:srgbClr val="E5DCCE"/>
-          </a:solidFill>
-          <a:ln>
-            <a:noFill/>
-          </a:ln>
-          <a:effectLst/>
-        </p:spPr>
-        <p:style>
-          <a:lnRef idx="1">
-            <a:schemeClr val="accent1"/>
-          </a:lnRef>
-          <a:fillRef idx="3">
-            <a:schemeClr val="accent1"/>
-          </a:fillRef>
-          <a:effectRef idx="2">
-            <a:schemeClr val="accent1"/>
-          </a:effectRef>
-          <a:fontRef idx="minor">
-            <a:schemeClr val="lt1"/>
-          </a:fontRef>
-        </p:style>
-        <p:txBody>
-          <a:bodyPr rtlCol="0" anchor="ctr"/>
-          <a:lstStyle/>
-          <a:p>
             <a:pPr algn="ctr"/>
-          </a:p>
-        </p:txBody>
-      </p:sp>
-      <p:sp>
-        <p:nvSpPr>
-          <p:cNvPr id="6" name="TextBox 5"/>
-          <p:cNvSpPr txBox="1"/>
-          <p:nvPr/>
-        </p:nvSpPr>
-        <p:spPr>
-          <a:xfrm>
-            <a:off x="566928" y="3391821"/>
-            <a:ext cx="11057839" cy="254000"/>
-          </a:xfrm>
-          <a:prstGeom prst="rect">
-            <a:avLst/>
-          </a:prstGeom>
-          <a:noFill/>
-        </p:spPr>
-        <p:txBody>
-          <a:bodyPr wrap="none" lIns="0" rIns="0" tIns="0" bIns="0">
-            <a:noAutofit/>
-          </a:bodyPr>
-          <a:lstStyle/>
-          <a:p>
-            <a:r>
-              <a:rPr sz="1600" b="1">
-                <a:solidFill>
-                  <a:srgbClr val="5C7268"/>
-                </a:solidFill>
-                <a:latin typeface="Avenir Next"/>
-                <a:ea typeface="Hiragino Sans"/>
-                <a:cs typeface="Hiragino Sans"/>
-              </a:rPr>
-              <a:t>② 混雑すると届かない｜安い電気が入ってこられない</a:t>
-            </a:r>
-          </a:p>
-        </p:txBody>
-      </p:sp>
-      <p:sp>
-        <p:nvSpPr>
-          <p:cNvPr id="7" name="TextBox 6"/>
-          <p:cNvSpPr txBox="1"/>
-          <p:nvPr/>
-        </p:nvSpPr>
-        <p:spPr>
-          <a:xfrm>
-            <a:off x="822960" y="3683921"/>
-            <a:ext cx="10801807" cy="385762"/>
-          </a:xfrm>
-          <a:prstGeom prst="rect">
-            <a:avLst/>
-          </a:prstGeom>
-          <a:noFill/>
-        </p:spPr>
-        <p:txBody>
-          <a:bodyPr wrap="square" lIns="0" rIns="0" tIns="0" bIns="0">
-            <a:noAutofit/>
-          </a:bodyPr>
-          <a:lstStyle/>
-          <a:p>
-            <a:pPr>
-              <a:lnSpc>
-                <a:spcPct val="130000"/>
-              </a:lnSpc>
-            </a:pPr>
-            <a:r>
-              <a:rPr sz="1500">
-                <a:solidFill>
-                  <a:srgbClr val="33221E"/>
-                </a:solidFill>
-                <a:latin typeface="Avenir Next"/>
-                <a:ea typeface="Hiragino Sans"/>
-                <a:cs typeface="Hiragino Sans"/>
-              </a:rPr>
-              <a:t>線路が満杯だと、その先で 1 MW 増やす需要は</a:t>
-            </a:r>
-            <a:r>
-              <a:rPr sz="1500" b="1">
-                <a:solidFill>
-                  <a:srgbClr val="33221E"/>
-                </a:solidFill>
-                <a:latin typeface="Avenir Next"/>
-                <a:ea typeface="Hiragino Sans"/>
-                <a:cs typeface="Hiragino Sans"/>
-              </a:rPr>
-              <a:t>その地点側の高い電源</a:t>
-            </a:r>
-            <a:r>
-              <a:rPr sz="1500">
-                <a:solidFill>
-                  <a:srgbClr val="33221E"/>
-                </a:solidFill>
-                <a:latin typeface="Avenir Next"/>
-                <a:ea typeface="Hiragino Sans"/>
-                <a:cs typeface="Hiragino Sans"/>
-              </a:rPr>
-              <a:t>で賄うしかない。だから LMP がそこだけ上がる。</a:t>
-            </a:r>
-          </a:p>
-        </p:txBody>
-      </p:sp>
-      <p:sp>
-        <p:nvSpPr>
-          <p:cNvPr id="8" name="Rectangle 7"/>
-          <p:cNvSpPr/>
-          <p:nvPr/>
-        </p:nvSpPr>
-        <p:spPr>
-          <a:xfrm>
-            <a:off x="566928" y="4221575"/>
-            <a:ext cx="11057839" cy="9525"/>
-          </a:xfrm>
-          <a:prstGeom prst="rect">
-            <a:avLst/>
-          </a:prstGeom>
-          <a:solidFill>
-            <a:srgbClr val="E5DCCE"/>
-          </a:solidFill>
-          <a:ln>
-            <a:noFill/>
-          </a:ln>
-          <a:effectLst/>
-        </p:spPr>
-        <p:style>
-          <a:lnRef idx="1">
-            <a:schemeClr val="accent1"/>
-          </a:lnRef>
-          <a:fillRef idx="3">
-            <a:schemeClr val="accent1"/>
-          </a:fillRef>
-          <a:effectRef idx="2">
-            <a:schemeClr val="accent1"/>
-          </a:effectRef>
-          <a:fontRef idx="minor">
-            <a:schemeClr val="lt1"/>
-          </a:fontRef>
-        </p:style>
-        <p:txBody>
-          <a:bodyPr rtlCol="0" anchor="ctr"/>
-          <a:lstStyle/>
-          <a:p>
-            <a:pPr algn="ctr"/>
-          </a:p>
-        </p:txBody>
-      </p:sp>
-      <p:sp>
-        <p:nvSpPr>
-          <p:cNvPr id="9" name="build:ghost"/>
-          <p:cNvSpPr txBox="1"/>
-          <p:nvPr/>
-        </p:nvSpPr>
-        <p:spPr>
-          <a:xfrm>
-            <a:off x="566928" y="4398867"/>
-            <a:ext cx="11057839" cy="254000"/>
-          </a:xfrm>
-          <a:prstGeom prst="rect">
-            <a:avLst/>
-          </a:prstGeom>
-          <a:noFill/>
-        </p:spPr>
-        <p:txBody>
-          <a:bodyPr wrap="none" lIns="0" rIns="0" tIns="0" bIns="0">
-            <a:noAutofit/>
-          </a:bodyPr>
-          <a:lstStyle/>
-          <a:p>
-            <a:r>
-              <a:rPr sz="1600" b="1">
-                <a:solidFill>
-                  <a:srgbClr val="C1C9C5"/>
-                </a:solidFill>
-                <a:latin typeface="Avenir Next"/>
-                <a:ea typeface="Hiragino Sans"/>
-                <a:cs typeface="Hiragino Sans"/>
-              </a:rPr>
-              <a:t>③ 分解すると 3 成分｜LMP = λ + 混雑 + 損失</a:t>
-            </a:r>
-          </a:p>
-        </p:txBody>
-      </p:sp>
-      <p:sp>
-        <p:nvSpPr>
-          <p:cNvPr id="10" name="build:ghost"/>
-          <p:cNvSpPr txBox="1"/>
-          <p:nvPr/>
-        </p:nvSpPr>
-        <p:spPr>
-          <a:xfrm>
-            <a:off x="822960" y="4690967"/>
-            <a:ext cx="10801807" cy="695325"/>
-          </a:xfrm>
-          <a:prstGeom prst="rect">
-            <a:avLst/>
-          </a:prstGeom>
-          <a:noFill/>
-        </p:spPr>
-        <p:txBody>
-          <a:bodyPr wrap="square" lIns="0" rIns="0" tIns="0" bIns="0">
-            <a:noAutofit/>
-          </a:bodyPr>
-          <a:lstStyle/>
-          <a:p>
-            <a:pPr>
-              <a:lnSpc>
-                <a:spcPct val="130000"/>
-              </a:lnSpc>
-            </a:pPr>
-            <a:r>
-              <a:rPr sz="1500">
-                <a:solidFill>
-                  <a:srgbClr val="C1BCBB"/>
-                </a:solidFill>
-                <a:latin typeface="Avenir Next"/>
-                <a:ea typeface="Hiragino Sans"/>
-                <a:cs typeface="Hiragino Sans"/>
-              </a:rPr>
-              <a:t>系統全体の λ に、混雑成分と損失成分が地点ごとに乗る。</a:t>
-            </a:r>
-            <a:r>
-              <a:rPr sz="1500" b="1">
-                <a:solidFill>
-                  <a:srgbClr val="C1BCBB"/>
-                </a:solidFill>
-                <a:latin typeface="Avenir Next"/>
-                <a:ea typeface="Hiragino Sans"/>
-                <a:cs typeface="Hiragino Sans"/>
-              </a:rPr>
-              <a:t>混雑レント = (LMP差) × 潮流</a:t>
-            </a:r>
-            <a:r>
-              <a:rPr sz="1500">
-                <a:solidFill>
-                  <a:srgbClr val="C1BCBB"/>
-                </a:solidFill>
-                <a:latin typeface="Avenir Next"/>
-                <a:ea typeface="Hiragino Sans"/>
-                <a:cs typeface="Hiragino Sans"/>
-              </a:rPr>
-              <a:t> が、送電線を増強する価値の目安になる。</a:t>
-            </a:r>
-          </a:p>
-        </p:txBody>
-      </p:sp>
-      <p:sp>
-        <p:nvSpPr>
-          <p:cNvPr id="11" name="TextBox 10"/>
+            <a:r>
+              <a:rPr sz="1400">
+                <a:solidFill>
+                  <a:srgbClr val="71635B"/>
+                </a:solidFill>
+                <a:latin typeface="Avenir Next"/>
+                <a:ea typeface="Hiragino Sans"/>
+                <a:cs typeface="Hiragino Sans"/>
+              </a:rPr>
+              <a:t>線路が満杯だと、その先で 1 MW 増やす需要はその地点側の高い電源で賄うしかない。だから LMP がそこだけ上がる。　出典｜コード/fig_ch14.py</a:t>
+            </a:r>
+          </a:p>
+        </p:txBody>
+      </p:sp>
+      <p:sp>
+        <p:nvSpPr>
+          <p:cNvPr id="5" name="TextBox 4"/>
           <p:cNvSpPr txBox="1"/>
           <p:nvPr/>
         </p:nvSpPr>
@@ -12624,59 +11360,14 @@
       <p:grpSpPr/>
       <p:sp>
         <p:nvSpPr>
-          <p:cNvPr id="2" name="TextBox 1"/>
+          <p:cNvPr id="2" name="edge:title"/>
           <p:cNvSpPr txBox="1"/>
           <p:nvPr/>
         </p:nvSpPr>
         <p:spPr>
           <a:xfrm>
-            <a:off x="566928" y="457200"/>
-            <a:ext cx="11057839" cy="658368"/>
-          </a:xfrm>
-          <a:prstGeom prst="rect">
-            <a:avLst/>
-          </a:prstGeom>
-          <a:noFill/>
-        </p:spPr>
-        <p:txBody>
-          <a:bodyPr wrap="square" lIns="0" rIns="0" tIns="0" bIns="0" anchor="ctr">
-            <a:noAutofit/>
-          </a:bodyPr>
-          <a:lstStyle/>
-          <a:p>
-            <a:pPr>
-              <a:lnSpc>
-                <a:spcPct val="106000"/>
-              </a:lnSpc>
-              <a:defRPr sz="3390" b="1">
-                <a:solidFill>
-                  <a:srgbClr val="7C332A"/>
-                </a:solidFill>
-                <a:latin typeface="Avenir Next"/>
-                <a:ea typeface="Hiragino Sans"/>
-                <a:cs typeface="Hiragino Sans"/>
-              </a:defRPr>
-            </a:pPr>
-            <a:r>
-              <a:rPr>
-                <a:ea typeface="Hiragino Sans"/>
-                <a:cs typeface="Hiragino Sans"/>
-              </a:rPr>
-              <a:t>導出 — LMP はなぜ地点で違うのか</a:t>
-            </a:r>
-          </a:p>
-        </p:txBody>
-      </p:sp>
-      <p:sp>
-        <p:nvSpPr>
-          <p:cNvPr id="3" name="TextBox 2"/>
-          <p:cNvSpPr txBox="1"/>
-          <p:nvPr/>
-        </p:nvSpPr>
-        <p:spPr>
-          <a:xfrm>
-            <a:off x="566928" y="2075212"/>
-            <a:ext cx="11057839" cy="254000"/>
+            <a:off x="566928" y="146304"/>
+            <a:ext cx="11057839" cy="457200"/>
           </a:xfrm>
           <a:prstGeom prst="rect">
             <a:avLst/>
@@ -12689,30 +11380,60 @@
           </a:bodyPr>
           <a:lstStyle/>
           <a:p>
-            <a:r>
-              <a:rPr sz="1600" b="1">
-                <a:solidFill>
-                  <a:srgbClr val="5C7268"/>
-                </a:solidFill>
-                <a:latin typeface="Avenir Next"/>
-                <a:ea typeface="Hiragino Sans"/>
-                <a:cs typeface="Hiragino Sans"/>
-              </a:rPr>
-              <a:t>① LMP の定義｜その地点で需要を 1 MW 増やしたときの総費用の増分</a:t>
-            </a:r>
-          </a:p>
-        </p:txBody>
-      </p:sp>
-      <p:sp>
-        <p:nvSpPr>
-          <p:cNvPr id="4" name="TextBox 3"/>
+            <a:pPr>
+              <a:defRPr sz="2400" b="1">
+                <a:solidFill>
+                  <a:srgbClr val="7C332A"/>
+                </a:solidFill>
+                <a:latin typeface="Avenir Next"/>
+                <a:ea typeface="Hiragino Sans"/>
+                <a:cs typeface="Hiragino Sans"/>
+              </a:defRPr>
+            </a:pPr>
+            <a:r>
+              <a:rPr>
+                <a:ea typeface="Hiragino Sans"/>
+                <a:cs typeface="Hiragino Sans"/>
+              </a:rPr>
+              <a:t>導出 — LMP はなぜ地点で違うのか</a:t>
+            </a:r>
+          </a:p>
+        </p:txBody>
+      </p:sp>
+      <p:pic>
+        <p:nvPicPr>
+          <p:cNvPr id="3" name="Picture 2" descr="ch14_deriv_lmp_3.png"/>
+          <p:cNvPicPr>
+            <a:picLocks noChangeAspect="1"/>
+          </p:cNvPicPr>
+          <p:nvPr/>
+        </p:nvPicPr>
+        <p:blipFill>
+          <a:blip r:embed="rId2"/>
+          <a:stretch>
+            <a:fillRect/>
+          </a:stretch>
+        </p:blipFill>
+        <p:spPr>
+          <a:xfrm>
+            <a:off x="228600" y="730157"/>
+            <a:ext cx="11734495" cy="5288466"/>
+          </a:xfrm>
+          <a:prstGeom prst="rect">
+            <a:avLst/>
+          </a:prstGeom>
+        </p:spPr>
+      </p:pic>
+      <p:sp>
+        <p:nvSpPr>
+          <p:cNvPr id="4" name="edge:caption"/>
           <p:cNvSpPr txBox="1"/>
           <p:nvPr/>
         </p:nvSpPr>
         <p:spPr>
           <a:xfrm>
-            <a:off x="822960" y="2367312"/>
-            <a:ext cx="10801807" cy="695325"/>
+            <a:off x="228600" y="6090412"/>
+            <a:ext cx="11734495" cy="520700"/>
           </a:xfrm>
           <a:prstGeom prst="rect">
             <a:avLst/>
@@ -12725,336 +11446,24 @@
           </a:bodyPr>
           <a:lstStyle/>
           <a:p>
-            <a:pPr>
-              <a:lnSpc>
-                <a:spcPct val="130000"/>
-              </a:lnSpc>
-            </a:pPr>
-            <a:r>
-              <a:rPr sz="1500">
-                <a:solidFill>
-                  <a:srgbClr val="33221E"/>
-                </a:solidFill>
-                <a:latin typeface="Avenir Next"/>
-                <a:ea typeface="Hiragino Sans"/>
-                <a:cs typeface="Hiragino Sans"/>
-              </a:rPr>
-              <a:t>λ と同じ考え方を「地点ごと」に適用する。混雑がなければ、どの地点で増やしても同じ機が応じるので </a:t>
-            </a:r>
-            <a:r>
-              <a:rPr sz="1500" b="1">
-                <a:solidFill>
-                  <a:srgbClr val="33221E"/>
-                </a:solidFill>
-                <a:latin typeface="Avenir Next"/>
-                <a:ea typeface="Hiragino Sans"/>
-                <a:cs typeface="Hiragino Sans"/>
-              </a:rPr>
-              <a:t>全地点で同じ値</a:t>
-            </a:r>
-            <a:r>
-              <a:rPr sz="1500">
-                <a:solidFill>
-                  <a:srgbClr val="33221E"/>
-                </a:solidFill>
-                <a:latin typeface="Avenir Next"/>
-                <a:ea typeface="Hiragino Sans"/>
-                <a:cs typeface="Hiragino Sans"/>
-              </a:rPr>
-              <a:t>になる。</a:t>
-            </a:r>
-          </a:p>
-        </p:txBody>
-      </p:sp>
-      <p:sp>
-        <p:nvSpPr>
-          <p:cNvPr id="5" name="Rectangle 4"/>
-          <p:cNvSpPr/>
-          <p:nvPr/>
-        </p:nvSpPr>
-        <p:spPr>
-          <a:xfrm>
-            <a:off x="566928" y="3214529"/>
-            <a:ext cx="11057839" cy="9525"/>
-          </a:xfrm>
-          <a:prstGeom prst="rect">
-            <a:avLst/>
-          </a:prstGeom>
-          <a:solidFill>
-            <a:srgbClr val="E5DCCE"/>
-          </a:solidFill>
-          <a:ln>
-            <a:noFill/>
-          </a:ln>
-          <a:effectLst/>
-        </p:spPr>
-        <p:style>
-          <a:lnRef idx="1">
-            <a:schemeClr val="accent1"/>
-          </a:lnRef>
-          <a:fillRef idx="3">
-            <a:schemeClr val="accent1"/>
-          </a:fillRef>
-          <a:effectRef idx="2">
-            <a:schemeClr val="accent1"/>
-          </a:effectRef>
-          <a:fontRef idx="minor">
-            <a:schemeClr val="lt1"/>
-          </a:fontRef>
-        </p:style>
-        <p:txBody>
-          <a:bodyPr rtlCol="0" anchor="ctr"/>
-          <a:lstStyle/>
-          <a:p>
             <a:pPr algn="ctr"/>
-          </a:p>
-        </p:txBody>
-      </p:sp>
-      <p:sp>
-        <p:nvSpPr>
-          <p:cNvPr id="6" name="TextBox 5"/>
-          <p:cNvSpPr txBox="1"/>
-          <p:nvPr/>
-        </p:nvSpPr>
-        <p:spPr>
-          <a:xfrm>
-            <a:off x="566928" y="3391821"/>
-            <a:ext cx="11057839" cy="254000"/>
-          </a:xfrm>
-          <a:prstGeom prst="rect">
-            <a:avLst/>
-          </a:prstGeom>
-          <a:noFill/>
-        </p:spPr>
-        <p:txBody>
-          <a:bodyPr wrap="none" lIns="0" rIns="0" tIns="0" bIns="0">
-            <a:noAutofit/>
-          </a:bodyPr>
-          <a:lstStyle/>
-          <a:p>
-            <a:r>
-              <a:rPr sz="1600" b="1">
-                <a:solidFill>
-                  <a:srgbClr val="5C7268"/>
-                </a:solidFill>
-                <a:latin typeface="Avenir Next"/>
-                <a:ea typeface="Hiragino Sans"/>
-                <a:cs typeface="Hiragino Sans"/>
-              </a:rPr>
-              <a:t>② 混雑すると届かない｜安い電気が入ってこられない</a:t>
-            </a:r>
-          </a:p>
-        </p:txBody>
-      </p:sp>
-      <p:sp>
-        <p:nvSpPr>
-          <p:cNvPr id="7" name="TextBox 6"/>
-          <p:cNvSpPr txBox="1"/>
-          <p:nvPr/>
-        </p:nvSpPr>
-        <p:spPr>
-          <a:xfrm>
-            <a:off x="822960" y="3683921"/>
-            <a:ext cx="10801807" cy="385762"/>
-          </a:xfrm>
-          <a:prstGeom prst="rect">
-            <a:avLst/>
-          </a:prstGeom>
-          <a:noFill/>
-        </p:spPr>
-        <p:txBody>
-          <a:bodyPr wrap="square" lIns="0" rIns="0" tIns="0" bIns="0">
-            <a:noAutofit/>
-          </a:bodyPr>
-          <a:lstStyle/>
-          <a:p>
-            <a:pPr>
-              <a:lnSpc>
-                <a:spcPct val="130000"/>
-              </a:lnSpc>
-            </a:pPr>
-            <a:r>
-              <a:rPr sz="1500">
-                <a:solidFill>
-                  <a:srgbClr val="33221E"/>
-                </a:solidFill>
-                <a:latin typeface="Avenir Next"/>
-                <a:ea typeface="Hiragino Sans"/>
-                <a:cs typeface="Hiragino Sans"/>
-              </a:rPr>
-              <a:t>線路が満杯だと、その先で 1 MW 増やす需要は</a:t>
-            </a:r>
-            <a:r>
-              <a:rPr sz="1500" b="1">
-                <a:solidFill>
-                  <a:srgbClr val="33221E"/>
-                </a:solidFill>
-                <a:latin typeface="Avenir Next"/>
-                <a:ea typeface="Hiragino Sans"/>
-                <a:cs typeface="Hiragino Sans"/>
-              </a:rPr>
-              <a:t>その地点側の高い電源</a:t>
-            </a:r>
-            <a:r>
-              <a:rPr sz="1500">
-                <a:solidFill>
-                  <a:srgbClr val="33221E"/>
-                </a:solidFill>
-                <a:latin typeface="Avenir Next"/>
-                <a:ea typeface="Hiragino Sans"/>
-                <a:cs typeface="Hiragino Sans"/>
-              </a:rPr>
-              <a:t>で賄うしかない。だから LMP がそこだけ上がる。</a:t>
-            </a:r>
-          </a:p>
-        </p:txBody>
-      </p:sp>
-      <p:sp>
-        <p:nvSpPr>
-          <p:cNvPr id="8" name="Rectangle 7"/>
-          <p:cNvSpPr/>
-          <p:nvPr/>
-        </p:nvSpPr>
-        <p:spPr>
-          <a:xfrm>
-            <a:off x="566928" y="4221575"/>
-            <a:ext cx="11057839" cy="9525"/>
-          </a:xfrm>
-          <a:prstGeom prst="rect">
-            <a:avLst/>
-          </a:prstGeom>
-          <a:solidFill>
-            <a:srgbClr val="E5DCCE"/>
-          </a:solidFill>
-          <a:ln>
-            <a:noFill/>
-          </a:ln>
-          <a:effectLst/>
-        </p:spPr>
-        <p:style>
-          <a:lnRef idx="1">
-            <a:schemeClr val="accent1"/>
-          </a:lnRef>
-          <a:fillRef idx="3">
-            <a:schemeClr val="accent1"/>
-          </a:fillRef>
-          <a:effectRef idx="2">
-            <a:schemeClr val="accent1"/>
-          </a:effectRef>
-          <a:fontRef idx="minor">
-            <a:schemeClr val="lt1"/>
-          </a:fontRef>
-        </p:style>
-        <p:txBody>
-          <a:bodyPr rtlCol="0" anchor="ctr"/>
-          <a:lstStyle/>
-          <a:p>
-            <a:pPr algn="ctr"/>
-          </a:p>
-        </p:txBody>
-      </p:sp>
-      <p:sp>
-        <p:nvSpPr>
-          <p:cNvPr id="9" name="TextBox 8"/>
-          <p:cNvSpPr txBox="1"/>
-          <p:nvPr/>
-        </p:nvSpPr>
-        <p:spPr>
-          <a:xfrm>
-            <a:off x="566928" y="4398867"/>
-            <a:ext cx="11057839" cy="254000"/>
-          </a:xfrm>
-          <a:prstGeom prst="rect">
-            <a:avLst/>
-          </a:prstGeom>
-          <a:noFill/>
-        </p:spPr>
-        <p:txBody>
-          <a:bodyPr wrap="none" lIns="0" rIns="0" tIns="0" bIns="0">
-            <a:noAutofit/>
-          </a:bodyPr>
-          <a:lstStyle/>
-          <a:p>
-            <a:r>
-              <a:rPr sz="1600" b="1">
-                <a:solidFill>
-                  <a:srgbClr val="5C7268"/>
-                </a:solidFill>
-                <a:latin typeface="Avenir Next"/>
-                <a:ea typeface="Hiragino Sans"/>
-                <a:cs typeface="Hiragino Sans"/>
-              </a:rPr>
-              <a:t>③ 分解すると 3 成分｜LMP = λ + 混雑 + 損失</a:t>
-            </a:r>
-          </a:p>
-        </p:txBody>
-      </p:sp>
-      <p:sp>
-        <p:nvSpPr>
-          <p:cNvPr id="10" name="TextBox 9"/>
-          <p:cNvSpPr txBox="1"/>
-          <p:nvPr/>
-        </p:nvSpPr>
-        <p:spPr>
-          <a:xfrm>
-            <a:off x="822960" y="4690967"/>
-            <a:ext cx="10801807" cy="695325"/>
-          </a:xfrm>
-          <a:prstGeom prst="rect">
-            <a:avLst/>
-          </a:prstGeom>
-          <a:noFill/>
-        </p:spPr>
-        <p:txBody>
-          <a:bodyPr wrap="square" lIns="0" rIns="0" tIns="0" bIns="0">
-            <a:noAutofit/>
-          </a:bodyPr>
-          <a:lstStyle/>
-          <a:p>
-            <a:pPr>
-              <a:lnSpc>
-                <a:spcPct val="130000"/>
-              </a:lnSpc>
-            </a:pPr>
-            <a:r>
-              <a:rPr sz="1500">
-                <a:solidFill>
-                  <a:srgbClr val="33221E"/>
-                </a:solidFill>
-                <a:latin typeface="Avenir Next"/>
-                <a:ea typeface="Hiragino Sans"/>
-                <a:cs typeface="Hiragino Sans"/>
-              </a:rPr>
-              <a:t>系統全体の λ に、混雑成分と損失成分が地点ごとに乗る。</a:t>
-            </a:r>
-            <a:r>
-              <a:rPr sz="1500" b="1">
-                <a:solidFill>
-                  <a:srgbClr val="33221E"/>
-                </a:solidFill>
-                <a:latin typeface="Avenir Next"/>
-                <a:ea typeface="Hiragino Sans"/>
-                <a:cs typeface="Hiragino Sans"/>
-              </a:rPr>
-              <a:t>混雑レント = (LMP差) × 潮流</a:t>
-            </a:r>
-            <a:r>
-              <a:rPr sz="1500">
-                <a:solidFill>
-                  <a:srgbClr val="33221E"/>
-                </a:solidFill>
-                <a:latin typeface="Avenir Next"/>
-                <a:ea typeface="Hiragino Sans"/>
-                <a:cs typeface="Hiragino Sans"/>
-              </a:rPr>
-              <a:t> が、送電線を増強する価値の目安になる。</a:t>
-            </a:r>
-          </a:p>
-        </p:txBody>
-      </p:sp>
-      <p:sp>
-        <p:nvSpPr>
-          <p:cNvPr id="11" name="TextBox 10"/>
+            <a:r>
+              <a:rPr sz="1400">
+                <a:solidFill>
+                  <a:srgbClr val="71635B"/>
+                </a:solidFill>
+                <a:latin typeface="Avenir Next"/>
+                <a:ea typeface="Hiragino Sans"/>
+                <a:cs typeface="Hiragino Sans"/>
+              </a:rPr>
+              <a:t>系統全体の λ に、混雑成分と損失成分が地点ごとに乗る。混雑レント = (LMP差) × 潮流 が、送電線を増強する価値の目安になる。　出典｜コード/fig_ch14.py</a:t>
+            </a:r>
+          </a:p>
+        </p:txBody>
+      </p:sp>
+      <p:sp>
+        <p:nvSpPr>
+          <p:cNvPr id="5" name="TextBox 4"/>
           <p:cNvSpPr txBox="1"/>
           <p:nvPr/>
         </p:nvSpPr>
@@ -18945,59 +17354,14 @@
       <p:grpSpPr/>
       <p:sp>
         <p:nvSpPr>
-          <p:cNvPr id="2" name="TextBox 1"/>
+          <p:cNvPr id="2" name="edge:title"/>
           <p:cNvSpPr txBox="1"/>
           <p:nvPr/>
         </p:nvSpPr>
         <p:spPr>
           <a:xfrm>
-            <a:off x="566928" y="457200"/>
-            <a:ext cx="11057839" cy="658368"/>
-          </a:xfrm>
-          <a:prstGeom prst="rect">
-            <a:avLst/>
-          </a:prstGeom>
-          <a:noFill/>
-        </p:spPr>
-        <p:txBody>
-          <a:bodyPr wrap="square" lIns="0" rIns="0" tIns="0" bIns="0" anchor="ctr">
-            <a:noAutofit/>
-          </a:bodyPr>
-          <a:lstStyle/>
-          <a:p>
-            <a:pPr>
-              <a:lnSpc>
-                <a:spcPct val="106000"/>
-              </a:lnSpc>
-              <a:defRPr sz="3390" b="1">
-                <a:solidFill>
-                  <a:srgbClr val="7C332A"/>
-                </a:solidFill>
-                <a:latin typeface="Avenir Next"/>
-                <a:ea typeface="Hiragino Sans"/>
-                <a:cs typeface="Hiragino Sans"/>
-              </a:defRPr>
-            </a:pPr>
-            <a:r>
-              <a:rPr>
-                <a:ea typeface="Hiragino Sans"/>
-                <a:cs typeface="Hiragino Sans"/>
-              </a:rPr>
-              <a:t>導出 — 等 λ 法</a:t>
-            </a:r>
-          </a:p>
-        </p:txBody>
-      </p:sp>
-      <p:sp>
-        <p:nvSpPr>
-          <p:cNvPr id="3" name="TextBox 2"/>
-          <p:cNvSpPr txBox="1"/>
-          <p:nvPr/>
-        </p:nvSpPr>
-        <p:spPr>
-          <a:xfrm>
-            <a:off x="566928" y="2229993"/>
-            <a:ext cx="11057839" cy="254000"/>
+            <a:off x="566928" y="146304"/>
+            <a:ext cx="11057839" cy="457200"/>
           </a:xfrm>
           <a:prstGeom prst="rect">
             <a:avLst/>
@@ -19010,30 +17374,60 @@
           </a:bodyPr>
           <a:lstStyle/>
           <a:p>
-            <a:r>
-              <a:rPr sz="1600" b="1">
-                <a:solidFill>
-                  <a:srgbClr val="5C7268"/>
-                </a:solidFill>
-                <a:latin typeface="Avenir Next"/>
-                <a:ea typeface="Hiragino Sans"/>
-                <a:cs typeface="Hiragino Sans"/>
-              </a:rPr>
-              <a:t>① 問題を書く｜総費用を最小に、需給は一致</a:t>
-            </a:r>
-          </a:p>
-        </p:txBody>
-      </p:sp>
-      <p:sp>
-        <p:nvSpPr>
-          <p:cNvPr id="4" name="TextBox 3"/>
+            <a:pPr>
+              <a:defRPr sz="2400" b="1">
+                <a:solidFill>
+                  <a:srgbClr val="7C332A"/>
+                </a:solidFill>
+                <a:latin typeface="Avenir Next"/>
+                <a:ea typeface="Hiragino Sans"/>
+                <a:cs typeface="Hiragino Sans"/>
+              </a:defRPr>
+            </a:pPr>
+            <a:r>
+              <a:rPr>
+                <a:ea typeface="Hiragino Sans"/>
+                <a:cs typeface="Hiragino Sans"/>
+              </a:rPr>
+              <a:t>導出 — 等 λ 法</a:t>
+            </a:r>
+          </a:p>
+        </p:txBody>
+      </p:sp>
+      <p:pic>
+        <p:nvPicPr>
+          <p:cNvPr id="3" name="Picture 2" descr="ch14_deriv_lambda_1.png"/>
+          <p:cNvPicPr>
+            <a:picLocks noChangeAspect="1"/>
+          </p:cNvPicPr>
+          <p:nvPr/>
+        </p:nvPicPr>
+        <p:blipFill>
+          <a:blip r:embed="rId2"/>
+          <a:stretch>
+            <a:fillRect/>
+          </a:stretch>
+        </p:blipFill>
+        <p:spPr>
+          <a:xfrm>
+            <a:off x="421269" y="713232"/>
+            <a:ext cx="11349156" cy="5532120"/>
+          </a:xfrm>
+          <a:prstGeom prst="rect">
+            <a:avLst/>
+          </a:prstGeom>
+        </p:spPr>
+      </p:pic>
+      <p:sp>
+        <p:nvSpPr>
+          <p:cNvPr id="4" name="edge:caption"/>
           <p:cNvSpPr txBox="1"/>
           <p:nvPr/>
         </p:nvSpPr>
         <p:spPr>
           <a:xfrm>
-            <a:off x="822960" y="2522093"/>
-            <a:ext cx="10801807" cy="385762"/>
+            <a:off x="228600" y="6300216"/>
+            <a:ext cx="11734495" cy="310896"/>
           </a:xfrm>
           <a:prstGeom prst="rect">
             <a:avLst/>
@@ -19046,314 +17440,24 @@
           </a:bodyPr>
           <a:lstStyle/>
           <a:p>
-            <a:pPr>
-              <a:lnSpc>
-                <a:spcPct val="130000"/>
-              </a:lnSpc>
-            </a:pPr>
-            <a:r>
-              <a:rPr sz="1500">
-                <a:solidFill>
-                  <a:srgbClr val="33221E"/>
-                </a:solidFill>
-                <a:latin typeface="Avenir Next"/>
-                <a:ea typeface="Hiragino Sans"/>
-                <a:cs typeface="Hiragino Sans"/>
-              </a:rPr>
-              <a:t>min Σ C_i(P_i)、条件 Σ P_i = D。制約付き最小化なのでラグランジュの未定乗数法を使う。</a:t>
-            </a:r>
-          </a:p>
-        </p:txBody>
-      </p:sp>
-      <p:sp>
-        <p:nvSpPr>
-          <p:cNvPr id="5" name="Rectangle 4"/>
-          <p:cNvSpPr/>
-          <p:nvPr/>
-        </p:nvSpPr>
-        <p:spPr>
-          <a:xfrm>
-            <a:off x="566928" y="3059747"/>
-            <a:ext cx="11057839" cy="9525"/>
-          </a:xfrm>
-          <a:prstGeom prst="rect">
-            <a:avLst/>
-          </a:prstGeom>
-          <a:solidFill>
-            <a:srgbClr val="E5DCCE"/>
-          </a:solidFill>
-          <a:ln>
-            <a:noFill/>
-          </a:ln>
-          <a:effectLst/>
-        </p:spPr>
-        <p:style>
-          <a:lnRef idx="1">
-            <a:schemeClr val="accent1"/>
-          </a:lnRef>
-          <a:fillRef idx="3">
-            <a:schemeClr val="accent1"/>
-          </a:fillRef>
-          <a:effectRef idx="2">
-            <a:schemeClr val="accent1"/>
-          </a:effectRef>
-          <a:fontRef idx="minor">
-            <a:schemeClr val="lt1"/>
-          </a:fontRef>
-        </p:style>
-        <p:txBody>
-          <a:bodyPr rtlCol="0" anchor="ctr"/>
-          <a:lstStyle/>
-          <a:p>
             <a:pPr algn="ctr"/>
-          </a:p>
-        </p:txBody>
-      </p:sp>
-      <p:sp>
-        <p:nvSpPr>
-          <p:cNvPr id="6" name="build:ghost"/>
-          <p:cNvSpPr txBox="1"/>
-          <p:nvPr/>
-        </p:nvSpPr>
-        <p:spPr>
-          <a:xfrm>
-            <a:off x="566928" y="3237039"/>
-            <a:ext cx="11057839" cy="254000"/>
-          </a:xfrm>
-          <a:prstGeom prst="rect">
-            <a:avLst/>
-          </a:prstGeom>
-          <a:noFill/>
-        </p:spPr>
-        <p:txBody>
-          <a:bodyPr wrap="none" lIns="0" rIns="0" tIns="0" bIns="0">
-            <a:noAutofit/>
-          </a:bodyPr>
-          <a:lstStyle/>
-          <a:p>
-            <a:r>
-              <a:rPr sz="1600" b="1">
-                <a:solidFill>
-                  <a:srgbClr val="C1C9C5"/>
-                </a:solidFill>
-                <a:latin typeface="Avenir Next"/>
-                <a:ea typeface="Hiragino Sans"/>
-                <a:cs typeface="Hiragino Sans"/>
-              </a:rPr>
-              <a:t>② 微分する｜L = Σ C_i(P_i) − λ(Σ P_i − D)</a:t>
-            </a:r>
-          </a:p>
-        </p:txBody>
-      </p:sp>
-      <p:sp>
-        <p:nvSpPr>
-          <p:cNvPr id="7" name="build:ghost"/>
-          <p:cNvSpPr txBox="1"/>
-          <p:nvPr/>
-        </p:nvSpPr>
-        <p:spPr>
-          <a:xfrm>
-            <a:off x="822960" y="3529139"/>
-            <a:ext cx="10801807" cy="385762"/>
-          </a:xfrm>
-          <a:prstGeom prst="rect">
-            <a:avLst/>
-          </a:prstGeom>
-          <a:noFill/>
-        </p:spPr>
-        <p:txBody>
-          <a:bodyPr wrap="square" lIns="0" rIns="0" tIns="0" bIns="0">
-            <a:noAutofit/>
-          </a:bodyPr>
-          <a:lstStyle/>
-          <a:p>
-            <a:pPr>
-              <a:lnSpc>
-                <a:spcPct val="130000"/>
-              </a:lnSpc>
-            </a:pPr>
-            <a:r>
-              <a:rPr sz="1500">
-                <a:solidFill>
-                  <a:srgbClr val="C1BCBB"/>
-                </a:solidFill>
-                <a:latin typeface="Avenir Next"/>
-                <a:ea typeface="Hiragino Sans"/>
-                <a:cs typeface="Hiragino Sans"/>
-              </a:rPr>
-              <a:t>P_i で偏微分して 0 と置くと </a:t>
-            </a:r>
-            <a:r>
-              <a:rPr sz="1500" b="1">
-                <a:solidFill>
-                  <a:srgbClr val="C1BCBB"/>
-                </a:solidFill>
-                <a:latin typeface="Avenir Next"/>
-                <a:ea typeface="Hiragino Sans"/>
-                <a:cs typeface="Hiragino Sans"/>
-              </a:rPr>
-              <a:t>dC_i/dP_i = λ</a:t>
-            </a:r>
-            <a:r>
-              <a:rPr sz="1500">
-                <a:solidFill>
-                  <a:srgbClr val="C1BCBB"/>
-                </a:solidFill>
-                <a:latin typeface="Avenir Next"/>
-                <a:ea typeface="Hiragino Sans"/>
-                <a:cs typeface="Hiragino Sans"/>
-              </a:rPr>
-              <a:t>（すべての i で同じ）。これが等 λ 条件である。</a:t>
-            </a:r>
-          </a:p>
-        </p:txBody>
-      </p:sp>
-      <p:sp>
-        <p:nvSpPr>
-          <p:cNvPr id="8" name="Rectangle 7"/>
-          <p:cNvSpPr/>
-          <p:nvPr/>
-        </p:nvSpPr>
-        <p:spPr>
-          <a:xfrm>
-            <a:off x="566928" y="4066793"/>
-            <a:ext cx="11057839" cy="9525"/>
-          </a:xfrm>
-          <a:prstGeom prst="rect">
-            <a:avLst/>
-          </a:prstGeom>
-          <a:solidFill>
-            <a:srgbClr val="E5DCCE"/>
-          </a:solidFill>
-          <a:ln>
-            <a:noFill/>
-          </a:ln>
-          <a:effectLst/>
-        </p:spPr>
-        <p:style>
-          <a:lnRef idx="1">
-            <a:schemeClr val="accent1"/>
-          </a:lnRef>
-          <a:fillRef idx="3">
-            <a:schemeClr val="accent1"/>
-          </a:fillRef>
-          <a:effectRef idx="2">
-            <a:schemeClr val="accent1"/>
-          </a:effectRef>
-          <a:fontRef idx="minor">
-            <a:schemeClr val="lt1"/>
-          </a:fontRef>
-        </p:style>
-        <p:txBody>
-          <a:bodyPr rtlCol="0" anchor="ctr"/>
-          <a:lstStyle/>
-          <a:p>
-            <a:pPr algn="ctr"/>
-          </a:p>
-        </p:txBody>
-      </p:sp>
-      <p:sp>
-        <p:nvSpPr>
-          <p:cNvPr id="9" name="build:ghost"/>
-          <p:cNvSpPr txBox="1"/>
-          <p:nvPr/>
-        </p:nvSpPr>
-        <p:spPr>
-          <a:xfrm>
-            <a:off x="566928" y="4244085"/>
-            <a:ext cx="11057839" cy="254000"/>
-          </a:xfrm>
-          <a:prstGeom prst="rect">
-            <a:avLst/>
-          </a:prstGeom>
-          <a:noFill/>
-        </p:spPr>
-        <p:txBody>
-          <a:bodyPr wrap="none" lIns="0" rIns="0" tIns="0" bIns="0">
-            <a:noAutofit/>
-          </a:bodyPr>
-          <a:lstStyle/>
-          <a:p>
-            <a:r>
-              <a:rPr sz="1600" b="1">
-                <a:solidFill>
-                  <a:srgbClr val="C1C9C5"/>
-                </a:solidFill>
-                <a:latin typeface="Avenir Next"/>
-                <a:ea typeface="Hiragino Sans"/>
-                <a:cs typeface="Hiragino Sans"/>
-              </a:rPr>
-              <a:t>③ 直感で確かめる｜λ が違えば動かす余地がある</a:t>
-            </a:r>
-          </a:p>
-        </p:txBody>
-      </p:sp>
-      <p:sp>
-        <p:nvSpPr>
-          <p:cNvPr id="10" name="build:ghost"/>
-          <p:cNvSpPr txBox="1"/>
-          <p:nvPr/>
-        </p:nvSpPr>
-        <p:spPr>
-          <a:xfrm>
-            <a:off x="822960" y="4536185"/>
-            <a:ext cx="10801807" cy="695325"/>
-          </a:xfrm>
-          <a:prstGeom prst="rect">
-            <a:avLst/>
-          </a:prstGeom>
-          <a:noFill/>
-        </p:spPr>
-        <p:txBody>
-          <a:bodyPr wrap="square" lIns="0" rIns="0" tIns="0" bIns="0">
-            <a:noAutofit/>
-          </a:bodyPr>
-          <a:lstStyle/>
-          <a:p>
-            <a:pPr>
-              <a:lnSpc>
-                <a:spcPct val="130000"/>
-              </a:lnSpc>
-            </a:pPr>
-            <a:r>
-              <a:rPr sz="1500">
-                <a:solidFill>
-                  <a:srgbClr val="C1BCBB"/>
-                </a:solidFill>
-                <a:latin typeface="Avenir Next"/>
-                <a:ea typeface="Hiragino Sans"/>
-                <a:cs typeface="Hiragino Sans"/>
-              </a:rPr>
-              <a:t>もし機 1 の λ が機 2 より高ければ、機 1 を 1 MW 減らして機 2 を 1 MW 増やすだけで総費用が下がる。</a:t>
-            </a:r>
-            <a:r>
-              <a:rPr sz="1500" b="1">
-                <a:solidFill>
-                  <a:srgbClr val="C1BCBB"/>
-                </a:solidFill>
-                <a:latin typeface="Avenir Next"/>
-                <a:ea typeface="Hiragino Sans"/>
-                <a:cs typeface="Hiragino Sans"/>
-              </a:rPr>
-              <a:t>下がらなくなる点が等しい点</a:t>
-            </a:r>
-            <a:r>
-              <a:rPr sz="1500">
-                <a:solidFill>
-                  <a:srgbClr val="C1BCBB"/>
-                </a:solidFill>
-                <a:latin typeface="Avenir Next"/>
-                <a:ea typeface="Hiragino Sans"/>
-                <a:cs typeface="Hiragino Sans"/>
-              </a:rPr>
-              <a:t>。λ は「あと 1 MWh の値段」。</a:t>
-            </a:r>
-          </a:p>
-        </p:txBody>
-      </p:sp>
-      <p:sp>
-        <p:nvSpPr>
-          <p:cNvPr id="11" name="TextBox 10"/>
+            <a:r>
+              <a:rPr sz="1400">
+                <a:solidFill>
+                  <a:srgbClr val="71635B"/>
+                </a:solidFill>
+                <a:latin typeface="Avenir Next"/>
+                <a:ea typeface="Hiragino Sans"/>
+                <a:cs typeface="Hiragino Sans"/>
+              </a:rPr>
+              <a:t>min Σ C_i(P_i)、条件 Σ P_i = D。制約付き最小化なのでラグランジュの未定乗数法を使う。　出典｜コード/fig_ch14.py</a:t>
+            </a:r>
+          </a:p>
+        </p:txBody>
+      </p:sp>
+      <p:sp>
+        <p:nvSpPr>
+          <p:cNvPr id="5" name="TextBox 4"/>
           <p:cNvSpPr txBox="1"/>
           <p:nvPr/>
         </p:nvSpPr>
